--- a/tests/testthat/temp.pptx
+++ b/tests/testthat/temp.pptx
@@ -3440,8 +3440,8 @@
           </p:nvSpPr>
           <p:spPr>
             <a:xfrm>
-              <a:off x="793972" y="1877752"/>
-              <a:ext cx="10920451" cy="3812052"/>
+              <a:off x="797995" y="1877752"/>
+              <a:ext cx="10916428" cy="3814338"/>
             </a:xfrm>
             <a:prstGeom prst="rect">
               <a:avLst/>
@@ -3466,21 +3466,21 @@
           </p:nvSpPr>
           <p:spPr>
             <a:xfrm>
-              <a:off x="793972" y="5206846"/>
-              <a:ext cx="10920451" cy="0"/>
+              <a:off x="797995" y="5208842"/>
+              <a:ext cx="10916428" cy="0"/>
             </a:xfrm>
             <a:custGeom>
               <a:avLst/>
               <a:pathLst>
-                <a:path w="10920451" h="0">
+                <a:path w="10916428" h="0">
                   <a:moveTo>
                     <a:pt x="0" y="0"/>
                   </a:moveTo>
                   <a:lnTo>
-                    <a:pt x="10920451" y="0"/>
+                    <a:pt x="10916428" y="0"/>
                   </a:lnTo>
                   <a:lnTo>
-                    <a:pt x="10920451" y="0"/>
+                    <a:pt x="10916428" y="0"/>
                   </a:lnTo>
                 </a:path>
               </a:pathLst>
@@ -3509,21 +3509,21 @@
           </p:nvSpPr>
           <p:spPr>
             <a:xfrm>
-              <a:off x="793972" y="4469505"/>
-              <a:ext cx="10920451" cy="0"/>
+              <a:off x="797995" y="4471059"/>
+              <a:ext cx="10916428" cy="0"/>
             </a:xfrm>
             <a:custGeom>
               <a:avLst/>
               <a:pathLst>
-                <a:path w="10920451" h="0">
+                <a:path w="10916428" h="0">
                   <a:moveTo>
                     <a:pt x="0" y="0"/>
                   </a:moveTo>
                   <a:lnTo>
-                    <a:pt x="10920451" y="0"/>
+                    <a:pt x="10916428" y="0"/>
                   </a:lnTo>
                   <a:lnTo>
-                    <a:pt x="10920451" y="0"/>
+                    <a:pt x="10916428" y="0"/>
                   </a:lnTo>
                 </a:path>
               </a:pathLst>
@@ -3552,21 +3552,21 @@
           </p:nvSpPr>
           <p:spPr>
             <a:xfrm>
-              <a:off x="793972" y="3732164"/>
-              <a:ext cx="10920451" cy="0"/>
+              <a:off x="797995" y="3733276"/>
+              <a:ext cx="10916428" cy="0"/>
             </a:xfrm>
             <a:custGeom>
               <a:avLst/>
               <a:pathLst>
-                <a:path w="10920451" h="0">
+                <a:path w="10916428" h="0">
                   <a:moveTo>
                     <a:pt x="0" y="0"/>
                   </a:moveTo>
                   <a:lnTo>
-                    <a:pt x="10920451" y="0"/>
+                    <a:pt x="10916428" y="0"/>
                   </a:lnTo>
                   <a:lnTo>
-                    <a:pt x="10920451" y="0"/>
+                    <a:pt x="10916428" y="0"/>
                   </a:lnTo>
                 </a:path>
               </a:pathLst>
@@ -3595,21 +3595,21 @@
           </p:nvSpPr>
           <p:spPr>
             <a:xfrm>
-              <a:off x="793972" y="2994823"/>
-              <a:ext cx="10920451" cy="0"/>
+              <a:off x="797995" y="2995493"/>
+              <a:ext cx="10916428" cy="0"/>
             </a:xfrm>
             <a:custGeom>
               <a:avLst/>
               <a:pathLst>
-                <a:path w="10920451" h="0">
+                <a:path w="10916428" h="0">
                   <a:moveTo>
                     <a:pt x="0" y="0"/>
                   </a:moveTo>
                   <a:lnTo>
-                    <a:pt x="10920451" y="0"/>
+                    <a:pt x="10916428" y="0"/>
                   </a:lnTo>
                   <a:lnTo>
-                    <a:pt x="10920451" y="0"/>
+                    <a:pt x="10916428" y="0"/>
                   </a:lnTo>
                 </a:path>
               </a:pathLst>
@@ -3638,21 +3638,21 @@
           </p:nvSpPr>
           <p:spPr>
             <a:xfrm>
-              <a:off x="793972" y="2257482"/>
-              <a:ext cx="10920451" cy="0"/>
+              <a:off x="797995" y="2257710"/>
+              <a:ext cx="10916428" cy="0"/>
             </a:xfrm>
             <a:custGeom>
               <a:avLst/>
               <a:pathLst>
-                <a:path w="10920451" h="0">
+                <a:path w="10916428" h="0">
                   <a:moveTo>
                     <a:pt x="0" y="0"/>
                   </a:moveTo>
                   <a:lnTo>
-                    <a:pt x="10920451" y="0"/>
+                    <a:pt x="10916428" y="0"/>
                   </a:lnTo>
                   <a:lnTo>
-                    <a:pt x="10920451" y="0"/>
+                    <a:pt x="10916428" y="0"/>
                   </a:lnTo>
                 </a:path>
               </a:pathLst>
@@ -3681,15 +3681,15 @@
           </p:nvSpPr>
           <p:spPr>
             <a:xfrm>
-              <a:off x="1257357" y="1877752"/>
-              <a:ext cx="0" cy="3812052"/>
+              <a:off x="1261209" y="1877752"/>
+              <a:ext cx="0" cy="3814338"/>
             </a:xfrm>
             <a:custGeom>
               <a:avLst/>
               <a:pathLst>
-                <a:path w="0" h="3812052">
+                <a:path w="0" h="3814338">
                   <a:moveTo>
-                    <a:pt x="0" y="3812052"/>
+                    <a:pt x="0" y="3814338"/>
                   </a:moveTo>
                   <a:lnTo>
                     <a:pt x="0" y="0"/>
@@ -3724,15 +3724,15 @@
           </p:nvSpPr>
           <p:spPr>
             <a:xfrm>
-              <a:off x="3795757" y="1877752"/>
-              <a:ext cx="0" cy="3812052"/>
+              <a:off x="3798674" y="1877752"/>
+              <a:ext cx="0" cy="3814338"/>
             </a:xfrm>
             <a:custGeom>
               <a:avLst/>
               <a:pathLst>
-                <a:path w="0" h="3812052">
+                <a:path w="0" h="3814338">
                   <a:moveTo>
-                    <a:pt x="0" y="3812052"/>
+                    <a:pt x="0" y="3814338"/>
                   </a:moveTo>
                   <a:lnTo>
                     <a:pt x="0" y="0"/>
@@ -3767,15 +3767,15 @@
           </p:nvSpPr>
           <p:spPr>
             <a:xfrm>
-              <a:off x="6334157" y="1877752"/>
-              <a:ext cx="0" cy="3812052"/>
+              <a:off x="6336139" y="1877752"/>
+              <a:ext cx="0" cy="3814338"/>
             </a:xfrm>
             <a:custGeom>
               <a:avLst/>
               <a:pathLst>
-                <a:path w="0" h="3812052">
+                <a:path w="0" h="3814338">
                   <a:moveTo>
-                    <a:pt x="0" y="3812052"/>
+                    <a:pt x="0" y="3814338"/>
                   </a:moveTo>
                   <a:lnTo>
                     <a:pt x="0" y="0"/>
@@ -3810,15 +3810,15 @@
           </p:nvSpPr>
           <p:spPr>
             <a:xfrm>
-              <a:off x="8872557" y="1877752"/>
-              <a:ext cx="0" cy="3812052"/>
+              <a:off x="8873604" y="1877752"/>
+              <a:ext cx="0" cy="3814338"/>
             </a:xfrm>
             <a:custGeom>
               <a:avLst/>
               <a:pathLst>
-                <a:path w="0" h="3812052">
+                <a:path w="0" h="3814338">
                   <a:moveTo>
-                    <a:pt x="0" y="3812052"/>
+                    <a:pt x="0" y="3814338"/>
                   </a:moveTo>
                   <a:lnTo>
                     <a:pt x="0" y="0"/>
@@ -3853,15 +3853,15 @@
           </p:nvSpPr>
           <p:spPr>
             <a:xfrm>
-              <a:off x="11410958" y="1877752"/>
-              <a:ext cx="0" cy="3812052"/>
+              <a:off x="11411070" y="1877752"/>
+              <a:ext cx="0" cy="3814338"/>
             </a:xfrm>
             <a:custGeom>
               <a:avLst/>
               <a:pathLst>
-                <a:path w="0" h="3812052">
+                <a:path w="0" h="3814338">
                   <a:moveTo>
-                    <a:pt x="0" y="3812052"/>
+                    <a:pt x="0" y="3814338"/>
                   </a:moveTo>
                   <a:lnTo>
                     <a:pt x="0" y="0"/>
@@ -3896,21 +3896,21 @@
           </p:nvSpPr>
           <p:spPr>
             <a:xfrm>
-              <a:off x="793972" y="5575516"/>
-              <a:ext cx="10920451" cy="0"/>
+              <a:off x="797995" y="5577734"/>
+              <a:ext cx="10916428" cy="0"/>
             </a:xfrm>
             <a:custGeom>
               <a:avLst/>
               <a:pathLst>
-                <a:path w="10920451" h="0">
+                <a:path w="10916428" h="0">
                   <a:moveTo>
                     <a:pt x="0" y="0"/>
                   </a:moveTo>
                   <a:lnTo>
-                    <a:pt x="10920451" y="0"/>
+                    <a:pt x="10916428" y="0"/>
                   </a:lnTo>
                   <a:lnTo>
-                    <a:pt x="10920451" y="0"/>
+                    <a:pt x="10916428" y="0"/>
                   </a:lnTo>
                 </a:path>
               </a:pathLst>
@@ -3939,21 +3939,21 @@
           </p:nvSpPr>
           <p:spPr>
             <a:xfrm>
-              <a:off x="793972" y="4838175"/>
-              <a:ext cx="10920451" cy="0"/>
+              <a:off x="797995" y="4839951"/>
+              <a:ext cx="10916428" cy="0"/>
             </a:xfrm>
             <a:custGeom>
               <a:avLst/>
               <a:pathLst>
-                <a:path w="10920451" h="0">
+                <a:path w="10916428" h="0">
                   <a:moveTo>
                     <a:pt x="0" y="0"/>
                   </a:moveTo>
                   <a:lnTo>
-                    <a:pt x="10920451" y="0"/>
+                    <a:pt x="10916428" y="0"/>
                   </a:lnTo>
                   <a:lnTo>
-                    <a:pt x="10920451" y="0"/>
+                    <a:pt x="10916428" y="0"/>
                   </a:lnTo>
                 </a:path>
               </a:pathLst>
@@ -3982,21 +3982,21 @@
           </p:nvSpPr>
           <p:spPr>
             <a:xfrm>
-              <a:off x="793972" y="4100834"/>
-              <a:ext cx="10920451" cy="0"/>
+              <a:off x="797995" y="4102168"/>
+              <a:ext cx="10916428" cy="0"/>
             </a:xfrm>
             <a:custGeom>
               <a:avLst/>
               <a:pathLst>
-                <a:path w="10920451" h="0">
+                <a:path w="10916428" h="0">
                   <a:moveTo>
                     <a:pt x="0" y="0"/>
                   </a:moveTo>
                   <a:lnTo>
-                    <a:pt x="10920451" y="0"/>
+                    <a:pt x="10916428" y="0"/>
                   </a:lnTo>
                   <a:lnTo>
-                    <a:pt x="10920451" y="0"/>
+                    <a:pt x="10916428" y="0"/>
                   </a:lnTo>
                 </a:path>
               </a:pathLst>
@@ -4025,21 +4025,21 @@
           </p:nvSpPr>
           <p:spPr>
             <a:xfrm>
-              <a:off x="793972" y="3363494"/>
-              <a:ext cx="10920451" cy="0"/>
+              <a:off x="797995" y="3364384"/>
+              <a:ext cx="10916428" cy="0"/>
             </a:xfrm>
             <a:custGeom>
               <a:avLst/>
               <a:pathLst>
-                <a:path w="10920451" h="0">
+                <a:path w="10916428" h="0">
                   <a:moveTo>
                     <a:pt x="0" y="0"/>
                   </a:moveTo>
                   <a:lnTo>
-                    <a:pt x="10920451" y="0"/>
+                    <a:pt x="10916428" y="0"/>
                   </a:lnTo>
                   <a:lnTo>
-                    <a:pt x="10920451" y="0"/>
+                    <a:pt x="10916428" y="0"/>
                   </a:lnTo>
                 </a:path>
               </a:pathLst>
@@ -4068,21 +4068,21 @@
           </p:nvSpPr>
           <p:spPr>
             <a:xfrm>
-              <a:off x="793972" y="2626153"/>
-              <a:ext cx="10920451" cy="0"/>
+              <a:off x="797995" y="2626601"/>
+              <a:ext cx="10916428" cy="0"/>
             </a:xfrm>
             <a:custGeom>
               <a:avLst/>
               <a:pathLst>
-                <a:path w="10920451" h="0">
+                <a:path w="10916428" h="0">
                   <a:moveTo>
                     <a:pt x="0" y="0"/>
                   </a:moveTo>
                   <a:lnTo>
-                    <a:pt x="10920451" y="0"/>
+                    <a:pt x="10916428" y="0"/>
                   </a:lnTo>
                   <a:lnTo>
-                    <a:pt x="10920451" y="0"/>
+                    <a:pt x="10916428" y="0"/>
                   </a:lnTo>
                 </a:path>
               </a:pathLst>
@@ -4111,21 +4111,21 @@
           </p:nvSpPr>
           <p:spPr>
             <a:xfrm>
-              <a:off x="793972" y="1888812"/>
-              <a:ext cx="10920451" cy="0"/>
+              <a:off x="797995" y="1888818"/>
+              <a:ext cx="10916428" cy="0"/>
             </a:xfrm>
             <a:custGeom>
               <a:avLst/>
               <a:pathLst>
-                <a:path w="10920451" h="0">
+                <a:path w="10916428" h="0">
                   <a:moveTo>
                     <a:pt x="0" y="0"/>
                   </a:moveTo>
                   <a:lnTo>
-                    <a:pt x="10920451" y="0"/>
+                    <a:pt x="10916428" y="0"/>
                   </a:lnTo>
                   <a:lnTo>
-                    <a:pt x="10920451" y="0"/>
+                    <a:pt x="10916428" y="0"/>
                   </a:lnTo>
                 </a:path>
               </a:pathLst>
@@ -4154,15 +4154,15 @@
           </p:nvSpPr>
           <p:spPr>
             <a:xfrm>
-              <a:off x="2526557" y="1877752"/>
-              <a:ext cx="0" cy="3812052"/>
+              <a:off x="2529942" y="1877752"/>
+              <a:ext cx="0" cy="3814338"/>
             </a:xfrm>
             <a:custGeom>
               <a:avLst/>
               <a:pathLst>
-                <a:path w="0" h="3812052">
+                <a:path w="0" h="3814338">
                   <a:moveTo>
-                    <a:pt x="0" y="3812052"/>
+                    <a:pt x="0" y="3814338"/>
                   </a:moveTo>
                   <a:lnTo>
                     <a:pt x="0" y="0"/>
@@ -4197,15 +4197,15 @@
           </p:nvSpPr>
           <p:spPr>
             <a:xfrm>
-              <a:off x="5064957" y="1877752"/>
-              <a:ext cx="0" cy="3812052"/>
+              <a:off x="5067407" y="1877752"/>
+              <a:ext cx="0" cy="3814338"/>
             </a:xfrm>
             <a:custGeom>
               <a:avLst/>
               <a:pathLst>
-                <a:path w="0" h="3812052">
+                <a:path w="0" h="3814338">
                   <a:moveTo>
-                    <a:pt x="0" y="3812052"/>
+                    <a:pt x="0" y="3814338"/>
                   </a:moveTo>
                   <a:lnTo>
                     <a:pt x="0" y="0"/>
@@ -4240,15 +4240,15 @@
           </p:nvSpPr>
           <p:spPr>
             <a:xfrm>
-              <a:off x="7603357" y="1877752"/>
-              <a:ext cx="0" cy="3812052"/>
+              <a:off x="7604872" y="1877752"/>
+              <a:ext cx="0" cy="3814338"/>
             </a:xfrm>
             <a:custGeom>
               <a:avLst/>
               <a:pathLst>
-                <a:path w="0" h="3812052">
+                <a:path w="0" h="3814338">
                   <a:moveTo>
-                    <a:pt x="0" y="3812052"/>
+                    <a:pt x="0" y="3814338"/>
                   </a:moveTo>
                   <a:lnTo>
                     <a:pt x="0" y="0"/>
@@ -4283,15 +4283,15 @@
           </p:nvSpPr>
           <p:spPr>
             <a:xfrm>
-              <a:off x="10141758" y="1877752"/>
-              <a:ext cx="0" cy="3812052"/>
+              <a:off x="10142337" y="1877752"/>
+              <a:ext cx="0" cy="3814338"/>
             </a:xfrm>
             <a:custGeom>
               <a:avLst/>
               <a:pathLst>
-                <a:path w="0" h="3812052">
+                <a:path w="0" h="3814338">
                   <a:moveTo>
-                    <a:pt x="0" y="3812052"/>
+                    <a:pt x="0" y="3814338"/>
                   </a:moveTo>
                   <a:lnTo>
                     <a:pt x="0" y="0"/>
@@ -4326,7 +4326,7 @@
           </p:nvSpPr>
           <p:spPr>
             <a:xfrm>
-              <a:off x="4067290" y="3920291"/>
+              <a:off x="4070095" y="3921536"/>
               <a:ext cx="66150" cy="66150"/>
             </a:xfrm>
             <a:prstGeom prst="ellipse">
@@ -4361,7 +4361,7 @@
           </p:nvSpPr>
           <p:spPr>
             <a:xfrm>
-              <a:off x="4714582" y="3920291"/>
+              <a:off x="4717149" y="3921536"/>
               <a:ext cx="66150" cy="66150"/>
             </a:xfrm>
             <a:prstGeom prst="ellipse">
@@ -4396,7 +4396,7 @@
           </p:nvSpPr>
           <p:spPr>
             <a:xfrm>
-              <a:off x="3305770" y="3654849"/>
+              <a:off x="3308856" y="3655934"/>
               <a:ext cx="66150" cy="66150"/>
             </a:xfrm>
             <a:prstGeom prst="ellipse">
@@ -4431,7 +4431,7 @@
           </p:nvSpPr>
           <p:spPr>
             <a:xfrm>
-              <a:off x="5577638" y="3861304"/>
+              <a:off x="5579887" y="3862513"/>
               <a:ext cx="66150" cy="66150"/>
             </a:xfrm>
             <a:prstGeom prst="ellipse">
@@ -4466,7 +4466,7 @@
           </p:nvSpPr>
           <p:spPr>
             <a:xfrm>
-              <a:off x="6148778" y="4259468"/>
+              <a:off x="6150816" y="4260916"/>
               <a:ext cx="66150" cy="66150"/>
             </a:xfrm>
             <a:prstGeom prst="ellipse">
@@ -4501,7 +4501,7 @@
           </p:nvSpPr>
           <p:spPr>
             <a:xfrm>
-              <a:off x="6199546" y="4347949"/>
+              <a:off x="6201566" y="4349450"/>
               <a:ext cx="66150" cy="66150"/>
             </a:xfrm>
             <a:prstGeom prst="ellipse">
@@ -4536,7 +4536,7 @@
           </p:nvSpPr>
           <p:spPr>
             <a:xfrm>
-              <a:off x="6478770" y="4908328"/>
+              <a:off x="6480687" y="4910165"/>
               <a:ext cx="66150" cy="66150"/>
             </a:xfrm>
             <a:prstGeom prst="ellipse">
@@ -4571,7 +4571,7 @@
           </p:nvSpPr>
           <p:spPr>
             <a:xfrm>
-              <a:off x="5514178" y="3418899"/>
+              <a:off x="5516450" y="3419843"/>
               <a:ext cx="66150" cy="66150"/>
             </a:xfrm>
             <a:prstGeom prst="ellipse">
@@ -4606,7 +4606,7 @@
           </p:nvSpPr>
           <p:spPr>
             <a:xfrm>
-              <a:off x="5412642" y="3654849"/>
+              <a:off x="5414952" y="3655934"/>
               <a:ext cx="66150" cy="66150"/>
             </a:xfrm>
             <a:prstGeom prst="ellipse">
@@ -4641,7 +4641,7 @@
           </p:nvSpPr>
           <p:spPr>
             <a:xfrm>
-              <a:off x="6148778" y="4185734"/>
+              <a:off x="6150816" y="4187138"/>
               <a:ext cx="66150" cy="66150"/>
             </a:xfrm>
             <a:prstGeom prst="ellipse">
@@ -4676,7 +4676,7 @@
           </p:nvSpPr>
           <p:spPr>
             <a:xfrm>
-              <a:off x="6148778" y="4392189"/>
+              <a:off x="6150816" y="4393717"/>
               <a:ext cx="66150" cy="66150"/>
             </a:xfrm>
             <a:prstGeom prst="ellipse">
@@ -4711,7 +4711,7 @@
           </p:nvSpPr>
           <p:spPr>
             <a:xfrm>
-              <a:off x="7747970" y="4598645"/>
+              <a:off x="7749419" y="4600296"/>
               <a:ext cx="66150" cy="66150"/>
             </a:xfrm>
             <a:prstGeom prst="ellipse">
@@ -4746,7 +4746,7 @@
           </p:nvSpPr>
           <p:spPr>
             <a:xfrm>
-              <a:off x="6884914" y="4465924"/>
+              <a:off x="6886681" y="4467495"/>
               <a:ext cx="66150" cy="66150"/>
             </a:xfrm>
             <a:prstGeom prst="ellipse">
@@ -4781,7 +4781,7 @@
           </p:nvSpPr>
           <p:spPr>
             <a:xfrm>
-              <a:off x="7011834" y="4775607"/>
+              <a:off x="7013555" y="4777364"/>
               <a:ext cx="66150" cy="66150"/>
             </a:xfrm>
             <a:prstGeom prst="ellipse">
@@ -4816,7 +4816,7 @@
           </p:nvSpPr>
           <p:spPr>
             <a:xfrm>
-              <a:off x="10743283" y="5483454"/>
+              <a:off x="10743628" y="5485636"/>
               <a:ext cx="66150" cy="66150"/>
             </a:xfrm>
             <a:prstGeom prst="ellipse">
@@ -4851,7 +4851,7 @@
           </p:nvSpPr>
           <p:spPr>
             <a:xfrm>
-              <a:off x="11184964" y="5483454"/>
+              <a:off x="11185147" y="5485636"/>
               <a:ext cx="66150" cy="66150"/>
             </a:xfrm>
             <a:prstGeom prst="ellipse">
@@ -4886,7 +4886,7 @@
           </p:nvSpPr>
           <p:spPr>
             <a:xfrm>
-              <a:off x="10984431" y="4849341"/>
+              <a:off x="10984687" y="4851143"/>
               <a:ext cx="66150" cy="66150"/>
             </a:xfrm>
             <a:prstGeom prst="ellipse">
@@ -4921,7 +4921,7 @@
           </p:nvSpPr>
           <p:spPr>
             <a:xfrm>
-              <a:off x="3001162" y="2239154"/>
+              <a:off x="3004360" y="2239390"/>
               <a:ext cx="66150" cy="66150"/>
             </a:xfrm>
             <a:prstGeom prst="ellipse">
@@ -4956,7 +4956,7 @@
           </p:nvSpPr>
           <p:spPr>
             <a:xfrm>
-              <a:off x="1516198" y="2534090"/>
+              <a:off x="1519943" y="2534504"/>
               <a:ext cx="66150" cy="66150"/>
             </a:xfrm>
             <a:prstGeom prst="ellipse">
@@ -4991,7 +4991,7 @@
           </p:nvSpPr>
           <p:spPr>
             <a:xfrm>
-              <a:off x="2074646" y="2017952"/>
+              <a:off x="2078185" y="2018056"/>
               <a:ext cx="66150" cy="66150"/>
             </a:xfrm>
             <a:prstGeom prst="ellipse">
@@ -5026,7 +5026,7 @@
           </p:nvSpPr>
           <p:spPr>
             <a:xfrm>
-              <a:off x="3673838" y="3846557"/>
+              <a:off x="3676788" y="3847758"/>
               <a:ext cx="66150" cy="66150"/>
             </a:xfrm>
             <a:prstGeom prst="ellipse">
@@ -5061,7 +5061,7 @@
           </p:nvSpPr>
           <p:spPr>
             <a:xfrm>
-              <a:off x="6351850" y="4731366"/>
+              <a:off x="6353814" y="4733097"/>
               <a:ext cx="66150" cy="66150"/>
             </a:xfrm>
             <a:prstGeom prst="ellipse">
@@ -5096,7 +5096,7 @@
           </p:nvSpPr>
           <p:spPr>
             <a:xfrm>
-              <a:off x="6136086" y="4775607"/>
+              <a:off x="6138129" y="4777364"/>
               <a:ext cx="66150" cy="66150"/>
             </a:xfrm>
             <a:prstGeom prst="ellipse">
@@ -5131,7 +5131,7 @@
           </p:nvSpPr>
           <p:spPr>
             <a:xfrm>
-              <a:off x="7164138" y="5055796"/>
+              <a:off x="7165802" y="5057722"/>
               <a:ext cx="66150" cy="66150"/>
             </a:xfrm>
             <a:prstGeom prst="ellipse">
@@ -5166,7 +5166,7 @@
           </p:nvSpPr>
           <p:spPr>
             <a:xfrm>
-              <a:off x="7176830" y="4185734"/>
+              <a:off x="7178490" y="4187138"/>
               <a:ext cx="66150" cy="66150"/>
             </a:xfrm>
             <a:prstGeom prst="ellipse">
@@ -5201,7 +5201,7 @@
           </p:nvSpPr>
           <p:spPr>
             <a:xfrm>
-              <a:off x="2328486" y="2991242"/>
+              <a:off x="2331931" y="2991929"/>
               <a:ext cx="66150" cy="66150"/>
             </a:xfrm>
             <a:prstGeom prst="ellipse">
@@ -5236,7 +5236,7 @@
           </p:nvSpPr>
           <p:spPr>
             <a:xfrm>
-              <a:off x="2848858" y="3182950"/>
+              <a:off x="2852112" y="3183753"/>
               <a:ext cx="66150" cy="66150"/>
             </a:xfrm>
             <a:prstGeom prst="ellipse">
@@ -5271,7 +5271,7 @@
           </p:nvSpPr>
           <p:spPr>
             <a:xfrm>
-              <a:off x="1257281" y="2534090"/>
+              <a:off x="1261121" y="2534504"/>
               <a:ext cx="66150" cy="66150"/>
             </a:xfrm>
             <a:prstGeom prst="ellipse">
@@ -5306,7 +5306,7 @@
           </p:nvSpPr>
           <p:spPr>
             <a:xfrm>
-              <a:off x="5463410" y="4687126"/>
+              <a:off x="5465701" y="4688830"/>
               <a:ext cx="66150" cy="66150"/>
             </a:xfrm>
             <a:prstGeom prst="ellipse">
@@ -5341,7 +5341,7 @@
           </p:nvSpPr>
           <p:spPr>
             <a:xfrm>
-              <a:off x="4448050" y="4112000"/>
+              <a:off x="4450715" y="4113360"/>
               <a:ext cx="66150" cy="66150"/>
             </a:xfrm>
             <a:prstGeom prst="ellipse">
@@ -5376,7 +5376,7 @@
           </p:nvSpPr>
           <p:spPr>
             <a:xfrm>
-              <a:off x="6478770" y="4805100"/>
+              <a:off x="6480687" y="4806876"/>
               <a:ext cx="66150" cy="66150"/>
             </a:xfrm>
             <a:prstGeom prst="ellipse">
@@ -5411,7 +5411,7 @@
           </p:nvSpPr>
           <p:spPr>
             <a:xfrm>
-              <a:off x="4473434" y="3861304"/>
+              <a:off x="4476089" y="3862513"/>
               <a:ext cx="66150" cy="66150"/>
             </a:xfrm>
             <a:prstGeom prst="ellipse">
@@ -5446,8 +5446,8 @@
           </p:nvSpPr>
           <p:spPr>
             <a:xfrm>
-              <a:off x="606983" y="5535466"/>
-              <a:ext cx="124358" cy="80101"/>
+              <a:off x="605703" y="5538186"/>
+              <a:ext cx="129661" cy="79095"/>
             </a:xfrm>
             <a:prstGeom prst="rect">
               <a:avLst/>
@@ -5476,8 +5476,8 @@
                       <a:alpha val="100000"/>
                     </a:srgbClr>
                   </a:solidFill>
-                  <a:latin typeface="Helvetica"/>
-                  <a:cs typeface="Helvetica"/>
+                  <a:latin typeface="Avenir Next"/>
+                  <a:cs typeface="Avenir Next"/>
                 </a:rPr>
                 <a:t>10</a:t>
               </a:r>
@@ -5492,8 +5492,8 @@
           </p:nvSpPr>
           <p:spPr>
             <a:xfrm>
-              <a:off x="606983" y="4798125"/>
-              <a:ext cx="124358" cy="80101"/>
+              <a:off x="605703" y="4800403"/>
+              <a:ext cx="129661" cy="79095"/>
             </a:xfrm>
             <a:prstGeom prst="rect">
               <a:avLst/>
@@ -5522,8 +5522,8 @@
                       <a:alpha val="100000"/>
                     </a:srgbClr>
                   </a:solidFill>
-                  <a:latin typeface="Helvetica"/>
-                  <a:cs typeface="Helvetica"/>
+                  <a:latin typeface="Avenir Next"/>
+                  <a:cs typeface="Avenir Next"/>
                 </a:rPr>
                 <a:t>15</a:t>
               </a:r>
@@ -5538,8 +5538,8 @@
           </p:nvSpPr>
           <p:spPr>
             <a:xfrm>
-              <a:off x="606983" y="4060784"/>
-              <a:ext cx="124358" cy="80101"/>
+              <a:off x="605703" y="4062620"/>
+              <a:ext cx="129661" cy="79095"/>
             </a:xfrm>
             <a:prstGeom prst="rect">
               <a:avLst/>
@@ -5568,8 +5568,8 @@
                       <a:alpha val="100000"/>
                     </a:srgbClr>
                   </a:solidFill>
-                  <a:latin typeface="Helvetica"/>
-                  <a:cs typeface="Helvetica"/>
+                  <a:latin typeface="Avenir Next"/>
+                  <a:cs typeface="Avenir Next"/>
                 </a:rPr>
                 <a:t>20</a:t>
               </a:r>
@@ -5584,8 +5584,8 @@
           </p:nvSpPr>
           <p:spPr>
             <a:xfrm>
-              <a:off x="606983" y="3323443"/>
-              <a:ext cx="124358" cy="80101"/>
+              <a:off x="605703" y="3324837"/>
+              <a:ext cx="129661" cy="79095"/>
             </a:xfrm>
             <a:prstGeom prst="rect">
               <a:avLst/>
@@ -5614,8 +5614,8 @@
                       <a:alpha val="100000"/>
                     </a:srgbClr>
                   </a:solidFill>
-                  <a:latin typeface="Helvetica"/>
-                  <a:cs typeface="Helvetica"/>
+                  <a:latin typeface="Avenir Next"/>
+                  <a:cs typeface="Avenir Next"/>
                 </a:rPr>
                 <a:t>25</a:t>
               </a:r>
@@ -5630,8 +5630,8 @@
           </p:nvSpPr>
           <p:spPr>
             <a:xfrm>
-              <a:off x="606983" y="2586102"/>
-              <a:ext cx="124358" cy="80101"/>
+              <a:off x="605703" y="2587054"/>
+              <a:ext cx="129661" cy="79095"/>
             </a:xfrm>
             <a:prstGeom prst="rect">
               <a:avLst/>
@@ -5660,8 +5660,8 @@
                       <a:alpha val="100000"/>
                     </a:srgbClr>
                   </a:solidFill>
-                  <a:latin typeface="Helvetica"/>
-                  <a:cs typeface="Helvetica"/>
+                  <a:latin typeface="Avenir Next"/>
+                  <a:cs typeface="Avenir Next"/>
                 </a:rPr>
                 <a:t>30</a:t>
               </a:r>
@@ -5676,8 +5676,8 @@
           </p:nvSpPr>
           <p:spPr>
             <a:xfrm>
-              <a:off x="606983" y="1848761"/>
-              <a:ext cx="124358" cy="80101"/>
+              <a:off x="605703" y="1849270"/>
+              <a:ext cx="129661" cy="79095"/>
             </a:xfrm>
             <a:prstGeom prst="rect">
               <a:avLst/>
@@ -5706,8 +5706,8 @@
                       <a:alpha val="100000"/>
                     </a:srgbClr>
                   </a:solidFill>
-                  <a:latin typeface="Helvetica"/>
-                  <a:cs typeface="Helvetica"/>
+                  <a:latin typeface="Avenir Next"/>
+                  <a:cs typeface="Avenir Next"/>
                 </a:rPr>
                 <a:t>35</a:t>
               </a:r>
@@ -5722,7 +5722,7 @@
           </p:nvSpPr>
           <p:spPr>
             <a:xfrm>
-              <a:off x="759177" y="5575516"/>
+              <a:off x="763200" y="5577734"/>
               <a:ext cx="34794" cy="0"/>
             </a:xfrm>
             <a:custGeom>
@@ -5762,7 +5762,7 @@
           </p:nvSpPr>
           <p:spPr>
             <a:xfrm>
-              <a:off x="759177" y="4838175"/>
+              <a:off x="763200" y="4839951"/>
               <a:ext cx="34794" cy="0"/>
             </a:xfrm>
             <a:custGeom>
@@ -5802,7 +5802,7 @@
           </p:nvSpPr>
           <p:spPr>
             <a:xfrm>
-              <a:off x="759177" y="4100834"/>
+              <a:off x="763200" y="4102168"/>
               <a:ext cx="34794" cy="0"/>
             </a:xfrm>
             <a:custGeom>
@@ -5842,7 +5842,7 @@
           </p:nvSpPr>
           <p:spPr>
             <a:xfrm>
-              <a:off x="759177" y="3363494"/>
+              <a:off x="763200" y="3364384"/>
               <a:ext cx="34794" cy="0"/>
             </a:xfrm>
             <a:custGeom>
@@ -5882,7 +5882,7 @@
           </p:nvSpPr>
           <p:spPr>
             <a:xfrm>
-              <a:off x="759177" y="2626153"/>
+              <a:off x="763200" y="2626601"/>
               <a:ext cx="34794" cy="0"/>
             </a:xfrm>
             <a:custGeom>
@@ -5922,7 +5922,7 @@
           </p:nvSpPr>
           <p:spPr>
             <a:xfrm>
-              <a:off x="759177" y="1888812"/>
+              <a:off x="763200" y="1888818"/>
               <a:ext cx="34794" cy="0"/>
             </a:xfrm>
             <a:custGeom>
@@ -5962,7 +5962,7 @@
           </p:nvSpPr>
           <p:spPr>
             <a:xfrm>
-              <a:off x="2526557" y="5689804"/>
+              <a:off x="2529942" y="5692090"/>
               <a:ext cx="0" cy="34794"/>
             </a:xfrm>
             <a:custGeom>
@@ -6002,7 +6002,7 @@
           </p:nvSpPr>
           <p:spPr>
             <a:xfrm>
-              <a:off x="5064957" y="5689804"/>
+              <a:off x="5067407" y="5692090"/>
               <a:ext cx="0" cy="34794"/>
             </a:xfrm>
             <a:custGeom>
@@ -6042,7 +6042,7 @@
           </p:nvSpPr>
           <p:spPr>
             <a:xfrm>
-              <a:off x="7603357" y="5689804"/>
+              <a:off x="7604872" y="5692090"/>
               <a:ext cx="0" cy="34794"/>
             </a:xfrm>
             <a:custGeom>
@@ -6082,7 +6082,7 @@
           </p:nvSpPr>
           <p:spPr>
             <a:xfrm>
-              <a:off x="10141758" y="5689804"/>
+              <a:off x="10142337" y="5692090"/>
               <a:ext cx="0" cy="34794"/>
             </a:xfrm>
             <a:custGeom>
@@ -6122,8 +6122,8 @@
           </p:nvSpPr>
           <p:spPr>
             <a:xfrm>
-              <a:off x="2495467" y="5752434"/>
-              <a:ext cx="62179" cy="80101"/>
+              <a:off x="2497526" y="5754720"/>
+              <a:ext cx="64830" cy="79095"/>
             </a:xfrm>
             <a:prstGeom prst="rect">
               <a:avLst/>
@@ -6152,8 +6152,8 @@
                       <a:alpha val="100000"/>
                     </a:srgbClr>
                   </a:solidFill>
-                  <a:latin typeface="Helvetica"/>
-                  <a:cs typeface="Helvetica"/>
+                  <a:latin typeface="Avenir Next"/>
+                  <a:cs typeface="Avenir Next"/>
                 </a:rPr>
                 <a:t>2</a:t>
               </a:r>
@@ -6168,8 +6168,8 @@
           </p:nvSpPr>
           <p:spPr>
             <a:xfrm>
-              <a:off x="5033867" y="5752434"/>
-              <a:ext cx="62179" cy="80101"/>
+              <a:off x="5034991" y="5754720"/>
+              <a:ext cx="64830" cy="79095"/>
             </a:xfrm>
             <a:prstGeom prst="rect">
               <a:avLst/>
@@ -6198,8 +6198,8 @@
                       <a:alpha val="100000"/>
                     </a:srgbClr>
                   </a:solidFill>
-                  <a:latin typeface="Helvetica"/>
-                  <a:cs typeface="Helvetica"/>
+                  <a:latin typeface="Avenir Next"/>
+                  <a:cs typeface="Avenir Next"/>
                 </a:rPr>
                 <a:t>3</a:t>
               </a:r>
@@ -6214,8 +6214,8 @@
           </p:nvSpPr>
           <p:spPr>
             <a:xfrm>
-              <a:off x="7572268" y="5752434"/>
-              <a:ext cx="62179" cy="80101"/>
+              <a:off x="7572456" y="5754720"/>
+              <a:ext cx="64830" cy="79095"/>
             </a:xfrm>
             <a:prstGeom prst="rect">
               <a:avLst/>
@@ -6244,8 +6244,8 @@
                       <a:alpha val="100000"/>
                     </a:srgbClr>
                   </a:solidFill>
-                  <a:latin typeface="Helvetica"/>
-                  <a:cs typeface="Helvetica"/>
+                  <a:latin typeface="Avenir Next"/>
+                  <a:cs typeface="Avenir Next"/>
                 </a:rPr>
                 <a:t>4</a:t>
               </a:r>
@@ -6260,8 +6260,8 @@
           </p:nvSpPr>
           <p:spPr>
             <a:xfrm>
-              <a:off x="10110668" y="5752434"/>
-              <a:ext cx="62179" cy="80101"/>
+              <a:off x="10109921" y="5754720"/>
+              <a:ext cx="64830" cy="79095"/>
             </a:xfrm>
             <a:prstGeom prst="rect">
               <a:avLst/>
@@ -6290,8 +6290,8 @@
                       <a:alpha val="100000"/>
                     </a:srgbClr>
                   </a:solidFill>
-                  <a:latin typeface="Helvetica"/>
-                  <a:cs typeface="Helvetica"/>
+                  <a:latin typeface="Avenir Next"/>
+                  <a:cs typeface="Avenir Next"/>
                 </a:rPr>
                 <a:t>5</a:t>
               </a:r>
@@ -6306,8 +6306,8 @@
           </p:nvSpPr>
           <p:spPr>
             <a:xfrm>
-              <a:off x="6184383" y="5892110"/>
-              <a:ext cx="139628" cy="100218"/>
+              <a:off x="6181960" y="5893391"/>
+              <a:ext cx="148498" cy="98938"/>
             </a:xfrm>
             <a:prstGeom prst="rect">
               <a:avLst/>
@@ -6336,8 +6336,8 @@
                       <a:alpha val="100000"/>
                     </a:srgbClr>
                   </a:solidFill>
-                  <a:latin typeface="Helvetica"/>
-                  <a:cs typeface="Helvetica"/>
+                  <a:latin typeface="Avenir Next"/>
+                  <a:cs typeface="Avenir Next"/>
                 </a:rPr>
                 <a:t>wt</a:t>
               </a:r>
@@ -6352,8 +6352,8 @@
           </p:nvSpPr>
           <p:spPr>
             <a:xfrm rot="-5400000">
-              <a:off x="355247" y="3733669"/>
-              <a:ext cx="271851" cy="100218"/>
+              <a:off x="340342" y="3735452"/>
+              <a:ext cx="300380" cy="98938"/>
             </a:xfrm>
             <a:prstGeom prst="rect">
               <a:avLst/>
@@ -6382,8 +6382,8 @@
                       <a:alpha val="100000"/>
                     </a:srgbClr>
                   </a:solidFill>
-                  <a:latin typeface="Helvetica"/>
-                  <a:cs typeface="Helvetica"/>
+                  <a:latin typeface="Avenir Next"/>
+                  <a:cs typeface="Avenir Next"/>
                 </a:rPr>
                 <a:t>mpg</a:t>
               </a:r>

--- a/tests/testthat/temp.pptx
+++ b/tests/testthat/temp.pptx
@@ -3440,8 +3440,8 @@
           </p:nvSpPr>
           <p:spPr>
             <a:xfrm>
-              <a:off x="797995" y="1877752"/>
-              <a:ext cx="10916428" cy="3814338"/>
+              <a:off x="800647" y="1877752"/>
+              <a:ext cx="10913776" cy="3809583"/>
             </a:xfrm>
             <a:prstGeom prst="rect">
               <a:avLst/>
@@ -3466,21 +3466,21 @@
           </p:nvSpPr>
           <p:spPr>
             <a:xfrm>
-              <a:off x="797995" y="5208842"/>
-              <a:ext cx="10916428" cy="0"/>
+              <a:off x="800647" y="5204690"/>
+              <a:ext cx="10913776" cy="0"/>
             </a:xfrm>
             <a:custGeom>
               <a:avLst/>
               <a:pathLst>
-                <a:path w="10916428" h="0">
+                <a:path w="10913776" h="0">
                   <a:moveTo>
                     <a:pt x="0" y="0"/>
                   </a:moveTo>
                   <a:lnTo>
-                    <a:pt x="10916428" y="0"/>
+                    <a:pt x="10913776" y="0"/>
                   </a:lnTo>
                   <a:lnTo>
-                    <a:pt x="10916428" y="0"/>
+                    <a:pt x="10913776" y="0"/>
                   </a:lnTo>
                 </a:path>
               </a:pathLst>
@@ -3509,21 +3509,21 @@
           </p:nvSpPr>
           <p:spPr>
             <a:xfrm>
-              <a:off x="797995" y="4471059"/>
-              <a:ext cx="10916428" cy="0"/>
+              <a:off x="800647" y="4467826"/>
+              <a:ext cx="10913776" cy="0"/>
             </a:xfrm>
             <a:custGeom>
               <a:avLst/>
               <a:pathLst>
-                <a:path w="10916428" h="0">
+                <a:path w="10913776" h="0">
                   <a:moveTo>
                     <a:pt x="0" y="0"/>
                   </a:moveTo>
                   <a:lnTo>
-                    <a:pt x="10916428" y="0"/>
+                    <a:pt x="10913776" y="0"/>
                   </a:lnTo>
                   <a:lnTo>
-                    <a:pt x="10916428" y="0"/>
+                    <a:pt x="10913776" y="0"/>
                   </a:lnTo>
                 </a:path>
               </a:pathLst>
@@ -3552,21 +3552,21 @@
           </p:nvSpPr>
           <p:spPr>
             <a:xfrm>
-              <a:off x="797995" y="3733276"/>
-              <a:ext cx="10916428" cy="0"/>
+              <a:off x="800647" y="3730963"/>
+              <a:ext cx="10913776" cy="0"/>
             </a:xfrm>
             <a:custGeom>
               <a:avLst/>
               <a:pathLst>
-                <a:path w="10916428" h="0">
+                <a:path w="10913776" h="0">
                   <a:moveTo>
                     <a:pt x="0" y="0"/>
                   </a:moveTo>
                   <a:lnTo>
-                    <a:pt x="10916428" y="0"/>
+                    <a:pt x="10913776" y="0"/>
                   </a:lnTo>
                   <a:lnTo>
-                    <a:pt x="10916428" y="0"/>
+                    <a:pt x="10913776" y="0"/>
                   </a:lnTo>
                 </a:path>
               </a:pathLst>
@@ -3595,21 +3595,21 @@
           </p:nvSpPr>
           <p:spPr>
             <a:xfrm>
-              <a:off x="797995" y="2995493"/>
-              <a:ext cx="10916428" cy="0"/>
+              <a:off x="800647" y="2994100"/>
+              <a:ext cx="10913776" cy="0"/>
             </a:xfrm>
             <a:custGeom>
               <a:avLst/>
               <a:pathLst>
-                <a:path w="10916428" h="0">
+                <a:path w="10913776" h="0">
                   <a:moveTo>
                     <a:pt x="0" y="0"/>
                   </a:moveTo>
                   <a:lnTo>
-                    <a:pt x="10916428" y="0"/>
+                    <a:pt x="10913776" y="0"/>
                   </a:lnTo>
                   <a:lnTo>
-                    <a:pt x="10916428" y="0"/>
+                    <a:pt x="10913776" y="0"/>
                   </a:lnTo>
                 </a:path>
               </a:pathLst>
@@ -3638,21 +3638,21 @@
           </p:nvSpPr>
           <p:spPr>
             <a:xfrm>
-              <a:off x="797995" y="2257710"/>
-              <a:ext cx="10916428" cy="0"/>
+              <a:off x="800647" y="2257236"/>
+              <a:ext cx="10913776" cy="0"/>
             </a:xfrm>
             <a:custGeom>
               <a:avLst/>
               <a:pathLst>
-                <a:path w="10916428" h="0">
+                <a:path w="10913776" h="0">
                   <a:moveTo>
                     <a:pt x="0" y="0"/>
                   </a:moveTo>
                   <a:lnTo>
-                    <a:pt x="10916428" y="0"/>
+                    <a:pt x="10913776" y="0"/>
                   </a:lnTo>
                   <a:lnTo>
-                    <a:pt x="10916428" y="0"/>
+                    <a:pt x="10913776" y="0"/>
                   </a:lnTo>
                 </a:path>
               </a:pathLst>
@@ -3681,15 +3681,15 @@
           </p:nvSpPr>
           <p:spPr>
             <a:xfrm>
-              <a:off x="1261209" y="1877752"/>
-              <a:ext cx="0" cy="3814338"/>
+              <a:off x="1263748" y="1877752"/>
+              <a:ext cx="0" cy="3809583"/>
             </a:xfrm>
             <a:custGeom>
               <a:avLst/>
               <a:pathLst>
-                <a:path w="0" h="3814338">
+                <a:path w="0" h="3809583">
                   <a:moveTo>
-                    <a:pt x="0" y="3814338"/>
+                    <a:pt x="0" y="3809583"/>
                   </a:moveTo>
                   <a:lnTo>
                     <a:pt x="0" y="0"/>
@@ -3724,15 +3724,15 @@
           </p:nvSpPr>
           <p:spPr>
             <a:xfrm>
-              <a:off x="3798674" y="1877752"/>
-              <a:ext cx="0" cy="3814338"/>
+              <a:off x="3800597" y="1877752"/>
+              <a:ext cx="0" cy="3809583"/>
             </a:xfrm>
             <a:custGeom>
               <a:avLst/>
               <a:pathLst>
-                <a:path w="0" h="3814338">
+                <a:path w="0" h="3809583">
                   <a:moveTo>
-                    <a:pt x="0" y="3814338"/>
+                    <a:pt x="0" y="3809583"/>
                   </a:moveTo>
                   <a:lnTo>
                     <a:pt x="0" y="0"/>
@@ -3767,15 +3767,15 @@
           </p:nvSpPr>
           <p:spPr>
             <a:xfrm>
-              <a:off x="6336139" y="1877752"/>
-              <a:ext cx="0" cy="3814338"/>
+              <a:off x="6337446" y="1877752"/>
+              <a:ext cx="0" cy="3809583"/>
             </a:xfrm>
             <a:custGeom>
               <a:avLst/>
               <a:pathLst>
-                <a:path w="0" h="3814338">
+                <a:path w="0" h="3809583">
                   <a:moveTo>
-                    <a:pt x="0" y="3814338"/>
+                    <a:pt x="0" y="3809583"/>
                   </a:moveTo>
                   <a:lnTo>
                     <a:pt x="0" y="0"/>
@@ -3810,15 +3810,15 @@
           </p:nvSpPr>
           <p:spPr>
             <a:xfrm>
-              <a:off x="8873604" y="1877752"/>
-              <a:ext cx="0" cy="3814338"/>
+              <a:off x="8874294" y="1877752"/>
+              <a:ext cx="0" cy="3809583"/>
             </a:xfrm>
             <a:custGeom>
               <a:avLst/>
               <a:pathLst>
-                <a:path w="0" h="3814338">
+                <a:path w="0" h="3809583">
                   <a:moveTo>
-                    <a:pt x="0" y="3814338"/>
+                    <a:pt x="0" y="3809583"/>
                   </a:moveTo>
                   <a:lnTo>
                     <a:pt x="0" y="0"/>
@@ -3853,15 +3853,15 @@
           </p:nvSpPr>
           <p:spPr>
             <a:xfrm>
-              <a:off x="11411070" y="1877752"/>
-              <a:ext cx="0" cy="3814338"/>
+              <a:off x="11411143" y="1877752"/>
+              <a:ext cx="0" cy="3809583"/>
             </a:xfrm>
             <a:custGeom>
               <a:avLst/>
               <a:pathLst>
-                <a:path w="0" h="3814338">
+                <a:path w="0" h="3809583">
                   <a:moveTo>
-                    <a:pt x="0" y="3814338"/>
+                    <a:pt x="0" y="3809583"/>
                   </a:moveTo>
                   <a:lnTo>
                     <a:pt x="0" y="0"/>
@@ -3896,21 +3896,21 @@
           </p:nvSpPr>
           <p:spPr>
             <a:xfrm>
-              <a:off x="797995" y="5577734"/>
-              <a:ext cx="10916428" cy="0"/>
+              <a:off x="800647" y="5573121"/>
+              <a:ext cx="10913776" cy="0"/>
             </a:xfrm>
             <a:custGeom>
               <a:avLst/>
               <a:pathLst>
-                <a:path w="10916428" h="0">
+                <a:path w="10913776" h="0">
                   <a:moveTo>
                     <a:pt x="0" y="0"/>
                   </a:moveTo>
                   <a:lnTo>
-                    <a:pt x="10916428" y="0"/>
+                    <a:pt x="10913776" y="0"/>
                   </a:lnTo>
                   <a:lnTo>
-                    <a:pt x="10916428" y="0"/>
+                    <a:pt x="10913776" y="0"/>
                   </a:lnTo>
                 </a:path>
               </a:pathLst>
@@ -3939,21 +3939,21 @@
           </p:nvSpPr>
           <p:spPr>
             <a:xfrm>
-              <a:off x="797995" y="4839951"/>
-              <a:ext cx="10916428" cy="0"/>
+              <a:off x="800647" y="4836258"/>
+              <a:ext cx="10913776" cy="0"/>
             </a:xfrm>
             <a:custGeom>
               <a:avLst/>
               <a:pathLst>
-                <a:path w="10916428" h="0">
+                <a:path w="10913776" h="0">
                   <a:moveTo>
                     <a:pt x="0" y="0"/>
                   </a:moveTo>
                   <a:lnTo>
-                    <a:pt x="10916428" y="0"/>
+                    <a:pt x="10913776" y="0"/>
                   </a:lnTo>
                   <a:lnTo>
-                    <a:pt x="10916428" y="0"/>
+                    <a:pt x="10913776" y="0"/>
                   </a:lnTo>
                 </a:path>
               </a:pathLst>
@@ -3982,21 +3982,21 @@
           </p:nvSpPr>
           <p:spPr>
             <a:xfrm>
-              <a:off x="797995" y="4102168"/>
-              <a:ext cx="10916428" cy="0"/>
+              <a:off x="800647" y="4099395"/>
+              <a:ext cx="10913776" cy="0"/>
             </a:xfrm>
             <a:custGeom>
               <a:avLst/>
               <a:pathLst>
-                <a:path w="10916428" h="0">
+                <a:path w="10913776" h="0">
                   <a:moveTo>
                     <a:pt x="0" y="0"/>
                   </a:moveTo>
                   <a:lnTo>
-                    <a:pt x="10916428" y="0"/>
+                    <a:pt x="10913776" y="0"/>
                   </a:lnTo>
                   <a:lnTo>
-                    <a:pt x="10916428" y="0"/>
+                    <a:pt x="10913776" y="0"/>
                   </a:lnTo>
                 </a:path>
               </a:pathLst>
@@ -4025,21 +4025,21 @@
           </p:nvSpPr>
           <p:spPr>
             <a:xfrm>
-              <a:off x="797995" y="3364384"/>
-              <a:ext cx="10916428" cy="0"/>
+              <a:off x="800647" y="3362531"/>
+              <a:ext cx="10913776" cy="0"/>
             </a:xfrm>
             <a:custGeom>
               <a:avLst/>
               <a:pathLst>
-                <a:path w="10916428" h="0">
+                <a:path w="10913776" h="0">
                   <a:moveTo>
                     <a:pt x="0" y="0"/>
                   </a:moveTo>
                   <a:lnTo>
-                    <a:pt x="10916428" y="0"/>
+                    <a:pt x="10913776" y="0"/>
                   </a:lnTo>
                   <a:lnTo>
-                    <a:pt x="10916428" y="0"/>
+                    <a:pt x="10913776" y="0"/>
                   </a:lnTo>
                 </a:path>
               </a:pathLst>
@@ -4068,21 +4068,21 @@
           </p:nvSpPr>
           <p:spPr>
             <a:xfrm>
-              <a:off x="797995" y="2626601"/>
-              <a:ext cx="10916428" cy="0"/>
+              <a:off x="800647" y="2625668"/>
+              <a:ext cx="10913776" cy="0"/>
             </a:xfrm>
             <a:custGeom>
               <a:avLst/>
               <a:pathLst>
-                <a:path w="10916428" h="0">
+                <a:path w="10913776" h="0">
                   <a:moveTo>
                     <a:pt x="0" y="0"/>
                   </a:moveTo>
                   <a:lnTo>
-                    <a:pt x="10916428" y="0"/>
+                    <a:pt x="10913776" y="0"/>
                   </a:lnTo>
                   <a:lnTo>
-                    <a:pt x="10916428" y="0"/>
+                    <a:pt x="10913776" y="0"/>
                   </a:lnTo>
                 </a:path>
               </a:pathLst>
@@ -4111,21 +4111,21 @@
           </p:nvSpPr>
           <p:spPr>
             <a:xfrm>
-              <a:off x="797995" y="1888818"/>
-              <a:ext cx="10916428" cy="0"/>
+              <a:off x="800647" y="1888804"/>
+              <a:ext cx="10913776" cy="0"/>
             </a:xfrm>
             <a:custGeom>
               <a:avLst/>
               <a:pathLst>
-                <a:path w="10916428" h="0">
+                <a:path w="10913776" h="0">
                   <a:moveTo>
                     <a:pt x="0" y="0"/>
                   </a:moveTo>
                   <a:lnTo>
-                    <a:pt x="10916428" y="0"/>
+                    <a:pt x="10913776" y="0"/>
                   </a:lnTo>
                   <a:lnTo>
-                    <a:pt x="10916428" y="0"/>
+                    <a:pt x="10913776" y="0"/>
                   </a:lnTo>
                 </a:path>
               </a:pathLst>
@@ -4154,15 +4154,15 @@
           </p:nvSpPr>
           <p:spPr>
             <a:xfrm>
-              <a:off x="2529942" y="1877752"/>
-              <a:ext cx="0" cy="3814338"/>
+              <a:off x="2532173" y="1877752"/>
+              <a:ext cx="0" cy="3809583"/>
             </a:xfrm>
             <a:custGeom>
               <a:avLst/>
               <a:pathLst>
-                <a:path w="0" h="3814338">
+                <a:path w="0" h="3809583">
                   <a:moveTo>
-                    <a:pt x="0" y="3814338"/>
+                    <a:pt x="0" y="3809583"/>
                   </a:moveTo>
                   <a:lnTo>
                     <a:pt x="0" y="0"/>
@@ -4197,15 +4197,15 @@
           </p:nvSpPr>
           <p:spPr>
             <a:xfrm>
-              <a:off x="5067407" y="1877752"/>
-              <a:ext cx="0" cy="3814338"/>
+              <a:off x="5069021" y="1877752"/>
+              <a:ext cx="0" cy="3809583"/>
             </a:xfrm>
             <a:custGeom>
               <a:avLst/>
               <a:pathLst>
-                <a:path w="0" h="3814338">
+                <a:path w="0" h="3809583">
                   <a:moveTo>
-                    <a:pt x="0" y="3814338"/>
+                    <a:pt x="0" y="3809583"/>
                   </a:moveTo>
                   <a:lnTo>
                     <a:pt x="0" y="0"/>
@@ -4240,15 +4240,15 @@
           </p:nvSpPr>
           <p:spPr>
             <a:xfrm>
-              <a:off x="7604872" y="1877752"/>
-              <a:ext cx="0" cy="3814338"/>
+              <a:off x="7605870" y="1877752"/>
+              <a:ext cx="0" cy="3809583"/>
             </a:xfrm>
             <a:custGeom>
               <a:avLst/>
               <a:pathLst>
-                <a:path w="0" h="3814338">
+                <a:path w="0" h="3809583">
                   <a:moveTo>
-                    <a:pt x="0" y="3814338"/>
+                    <a:pt x="0" y="3809583"/>
                   </a:moveTo>
                   <a:lnTo>
                     <a:pt x="0" y="0"/>
@@ -4283,15 +4283,15 @@
           </p:nvSpPr>
           <p:spPr>
             <a:xfrm>
-              <a:off x="10142337" y="1877752"/>
-              <a:ext cx="0" cy="3814338"/>
+              <a:off x="10142719" y="1877752"/>
+              <a:ext cx="0" cy="3809583"/>
             </a:xfrm>
             <a:custGeom>
               <a:avLst/>
               <a:pathLst>
-                <a:path w="0" h="3814338">
+                <a:path w="0" h="3809583">
                   <a:moveTo>
-                    <a:pt x="0" y="3814338"/>
+                    <a:pt x="0" y="3809583"/>
                   </a:moveTo>
                   <a:lnTo>
                     <a:pt x="0" y="0"/>
@@ -4326,7 +4326,7 @@
           </p:nvSpPr>
           <p:spPr>
             <a:xfrm>
-              <a:off x="4070095" y="3921536"/>
+              <a:off x="4071944" y="3918947"/>
               <a:ext cx="66150" cy="66150"/>
             </a:xfrm>
             <a:prstGeom prst="ellipse">
@@ -4361,7 +4361,7 @@
           </p:nvSpPr>
           <p:spPr>
             <a:xfrm>
-              <a:off x="4717149" y="3921536"/>
+              <a:off x="4718840" y="3918947"/>
               <a:ext cx="66150" cy="66150"/>
             </a:xfrm>
             <a:prstGeom prst="ellipse">
@@ -4396,7 +4396,7 @@
           </p:nvSpPr>
           <p:spPr>
             <a:xfrm>
-              <a:off x="3308856" y="3655934"/>
+              <a:off x="3310889" y="3653676"/>
               <a:ext cx="66150" cy="66150"/>
             </a:xfrm>
             <a:prstGeom prst="ellipse">
@@ -4431,7 +4431,7 @@
           </p:nvSpPr>
           <p:spPr>
             <a:xfrm>
-              <a:off x="5579887" y="3862513"/>
+              <a:off x="5581369" y="3859998"/>
               <a:ext cx="66150" cy="66150"/>
             </a:xfrm>
             <a:prstGeom prst="ellipse">
@@ -4466,7 +4466,7 @@
           </p:nvSpPr>
           <p:spPr>
             <a:xfrm>
-              <a:off x="6150816" y="4260916"/>
+              <a:off x="6152160" y="4257904"/>
               <a:ext cx="66150" cy="66150"/>
             </a:xfrm>
             <a:prstGeom prst="ellipse">
@@ -4501,7 +4501,7 @@
           </p:nvSpPr>
           <p:spPr>
             <a:xfrm>
-              <a:off x="6201566" y="4349450"/>
+              <a:off x="6202897" y="4346328"/>
               <a:ext cx="66150" cy="66150"/>
             </a:xfrm>
             <a:prstGeom prst="ellipse">
@@ -4536,7 +4536,7 @@
           </p:nvSpPr>
           <p:spPr>
             <a:xfrm>
-              <a:off x="6480687" y="4910165"/>
+              <a:off x="6481950" y="4906344"/>
               <a:ext cx="66150" cy="66150"/>
             </a:xfrm>
             <a:prstGeom prst="ellipse">
@@ -4571,7 +4571,7 @@
           </p:nvSpPr>
           <p:spPr>
             <a:xfrm>
-              <a:off x="5516450" y="3419843"/>
+              <a:off x="5517948" y="3417880"/>
               <a:ext cx="66150" cy="66150"/>
             </a:xfrm>
             <a:prstGeom prst="ellipse">
@@ -4606,7 +4606,7 @@
           </p:nvSpPr>
           <p:spPr>
             <a:xfrm>
-              <a:off x="5414952" y="3655934"/>
+              <a:off x="5416474" y="3653676"/>
               <a:ext cx="66150" cy="66150"/>
             </a:xfrm>
             <a:prstGeom prst="ellipse">
@@ -4641,7 +4641,7 @@
           </p:nvSpPr>
           <p:spPr>
             <a:xfrm>
-              <a:off x="6150816" y="4187138"/>
+              <a:off x="6152160" y="4184218"/>
               <a:ext cx="66150" cy="66150"/>
             </a:xfrm>
             <a:prstGeom prst="ellipse">
@@ -4676,7 +4676,7 @@
           </p:nvSpPr>
           <p:spPr>
             <a:xfrm>
-              <a:off x="6150816" y="4393717"/>
+              <a:off x="6152160" y="4390540"/>
               <a:ext cx="66150" cy="66150"/>
             </a:xfrm>
             <a:prstGeom prst="ellipse">
@@ -4711,7 +4711,7 @@
           </p:nvSpPr>
           <p:spPr>
             <a:xfrm>
-              <a:off x="7749419" y="4600296"/>
+              <a:off x="7750375" y="4596861"/>
               <a:ext cx="66150" cy="66150"/>
             </a:xfrm>
             <a:prstGeom prst="ellipse">
@@ -4746,7 +4746,7 @@
           </p:nvSpPr>
           <p:spPr>
             <a:xfrm>
-              <a:off x="6886681" y="4467495"/>
+              <a:off x="6887846" y="4464226"/>
               <a:ext cx="66150" cy="66150"/>
             </a:xfrm>
             <a:prstGeom prst="ellipse">
@@ -4781,7 +4781,7 @@
           </p:nvSpPr>
           <p:spPr>
             <a:xfrm>
-              <a:off x="7013555" y="4777364"/>
+              <a:off x="7014688" y="4773709"/>
               <a:ext cx="66150" cy="66150"/>
             </a:xfrm>
             <a:prstGeom prst="ellipse">
@@ -4816,7 +4816,7 @@
           </p:nvSpPr>
           <p:spPr>
             <a:xfrm>
-              <a:off x="10743628" y="5485636"/>
+              <a:off x="10743856" y="5481097"/>
               <a:ext cx="66150" cy="66150"/>
             </a:xfrm>
             <a:prstGeom prst="ellipse">
@@ -4851,7 +4851,7 @@
           </p:nvSpPr>
           <p:spPr>
             <a:xfrm>
-              <a:off x="11185147" y="5485636"/>
+              <a:off x="11185268" y="5481097"/>
               <a:ext cx="66150" cy="66150"/>
             </a:xfrm>
             <a:prstGeom prst="ellipse">
@@ -4886,7 +4886,7 @@
           </p:nvSpPr>
           <p:spPr>
             <a:xfrm>
-              <a:off x="10984687" y="4851143"/>
+              <a:off x="10984857" y="4847395"/>
               <a:ext cx="66150" cy="66150"/>
             </a:xfrm>
             <a:prstGeom prst="ellipse">
@@ -4921,7 +4921,7 @@
           </p:nvSpPr>
           <p:spPr>
             <a:xfrm>
-              <a:off x="3004360" y="2239390"/>
+              <a:off x="3006467" y="2238898"/>
               <a:ext cx="66150" cy="66150"/>
             </a:xfrm>
             <a:prstGeom prst="ellipse">
@@ -4956,7 +4956,7 @@
           </p:nvSpPr>
           <p:spPr>
             <a:xfrm>
-              <a:off x="1519943" y="2534504"/>
+              <a:off x="1522411" y="2533644"/>
               <a:ext cx="66150" cy="66150"/>
             </a:xfrm>
             <a:prstGeom prst="ellipse">
@@ -4991,7 +4991,7 @@
           </p:nvSpPr>
           <p:spPr>
             <a:xfrm>
-              <a:off x="2078185" y="2018056"/>
+              <a:off x="2080518" y="2017839"/>
               <a:ext cx="66150" cy="66150"/>
             </a:xfrm>
             <a:prstGeom prst="ellipse">
@@ -5026,7 +5026,7 @@
           </p:nvSpPr>
           <p:spPr>
             <a:xfrm>
-              <a:off x="3676788" y="3847758"/>
+              <a:off x="3678732" y="3845261"/>
               <a:ext cx="66150" cy="66150"/>
             </a:xfrm>
             <a:prstGeom prst="ellipse">
@@ -5061,7 +5061,7 @@
           </p:nvSpPr>
           <p:spPr>
             <a:xfrm>
-              <a:off x="6353814" y="4733097"/>
+              <a:off x="6355108" y="4729497"/>
               <a:ext cx="66150" cy="66150"/>
             </a:xfrm>
             <a:prstGeom prst="ellipse">
@@ -5096,7 +5096,7 @@
           </p:nvSpPr>
           <p:spPr>
             <a:xfrm>
-              <a:off x="6138129" y="4777364"/>
+              <a:off x="6139476" y="4773709"/>
               <a:ext cx="66150" cy="66150"/>
             </a:xfrm>
             <a:prstGeom prst="ellipse">
@@ -5131,7 +5131,7 @@
           </p:nvSpPr>
           <p:spPr>
             <a:xfrm>
-              <a:off x="7165802" y="5057722"/>
+              <a:off x="7166899" y="5053717"/>
               <a:ext cx="66150" cy="66150"/>
             </a:xfrm>
             <a:prstGeom prst="ellipse">
@@ -5166,7 +5166,7 @@
           </p:nvSpPr>
           <p:spPr>
             <a:xfrm>
-              <a:off x="7178490" y="4187138"/>
+              <a:off x="7179584" y="4184218"/>
               <a:ext cx="66150" cy="66150"/>
             </a:xfrm>
             <a:prstGeom prst="ellipse">
@@ -5201,7 +5201,7 @@
           </p:nvSpPr>
           <p:spPr>
             <a:xfrm>
-              <a:off x="2331931" y="2991929"/>
+              <a:off x="2334203" y="2990499"/>
               <a:ext cx="66150" cy="66150"/>
             </a:xfrm>
             <a:prstGeom prst="ellipse">
@@ -5236,7 +5236,7 @@
           </p:nvSpPr>
           <p:spPr>
             <a:xfrm>
-              <a:off x="2852112" y="3183753"/>
+              <a:off x="2854257" y="3182084"/>
               <a:ext cx="66150" cy="66150"/>
             </a:xfrm>
             <a:prstGeom prst="ellipse">
@@ -5271,7 +5271,7 @@
           </p:nvSpPr>
           <p:spPr>
             <a:xfrm>
-              <a:off x="1261121" y="2534504"/>
+              <a:off x="1263652" y="2533644"/>
               <a:ext cx="66150" cy="66150"/>
             </a:xfrm>
             <a:prstGeom prst="ellipse">
@@ -5306,7 +5306,7 @@
           </p:nvSpPr>
           <p:spPr>
             <a:xfrm>
-              <a:off x="5465701" y="4688830"/>
+              <a:off x="5467211" y="4685285"/>
               <a:ext cx="66150" cy="66150"/>
             </a:xfrm>
             <a:prstGeom prst="ellipse">
@@ -5341,7 +5341,7 @@
           </p:nvSpPr>
           <p:spPr>
             <a:xfrm>
-              <a:off x="4450715" y="4113360"/>
+              <a:off x="4452471" y="4110531"/>
               <a:ext cx="66150" cy="66150"/>
             </a:xfrm>
             <a:prstGeom prst="ellipse">
@@ -5376,7 +5376,7 @@
           </p:nvSpPr>
           <p:spPr>
             <a:xfrm>
-              <a:off x="6480687" y="4806876"/>
+              <a:off x="6481950" y="4803183"/>
               <a:ext cx="66150" cy="66150"/>
             </a:xfrm>
             <a:prstGeom prst="ellipse">
@@ -5411,7 +5411,7 @@
           </p:nvSpPr>
           <p:spPr>
             <a:xfrm>
-              <a:off x="4476089" y="3862513"/>
+              <a:off x="4477840" y="3859998"/>
               <a:ext cx="66150" cy="66150"/>
             </a:xfrm>
             <a:prstGeom prst="ellipse">
@@ -5446,7 +5446,7 @@
           </p:nvSpPr>
           <p:spPr>
             <a:xfrm>
-              <a:off x="605703" y="5538186"/>
+              <a:off x="608355" y="5533574"/>
               <a:ext cx="129661" cy="79095"/>
             </a:xfrm>
             <a:prstGeom prst="rect">
@@ -5492,7 +5492,7 @@
           </p:nvSpPr>
           <p:spPr>
             <a:xfrm>
-              <a:off x="605703" y="4800403"/>
+              <a:off x="608355" y="4796710"/>
               <a:ext cx="129661" cy="79095"/>
             </a:xfrm>
             <a:prstGeom prst="rect">
@@ -5538,7 +5538,7 @@
           </p:nvSpPr>
           <p:spPr>
             <a:xfrm>
-              <a:off x="605703" y="4062620"/>
+              <a:off x="608355" y="4059847"/>
               <a:ext cx="129661" cy="79095"/>
             </a:xfrm>
             <a:prstGeom prst="rect">
@@ -5584,7 +5584,7 @@
           </p:nvSpPr>
           <p:spPr>
             <a:xfrm>
-              <a:off x="605703" y="3324837"/>
+              <a:off x="608355" y="3322983"/>
               <a:ext cx="129661" cy="79095"/>
             </a:xfrm>
             <a:prstGeom prst="rect">
@@ -5630,7 +5630,7 @@
           </p:nvSpPr>
           <p:spPr>
             <a:xfrm>
-              <a:off x="605703" y="2587054"/>
+              <a:off x="608355" y="2586120"/>
               <a:ext cx="129661" cy="79095"/>
             </a:xfrm>
             <a:prstGeom prst="rect">
@@ -5676,7 +5676,7 @@
           </p:nvSpPr>
           <p:spPr>
             <a:xfrm>
-              <a:off x="605703" y="1849270"/>
+              <a:off x="608355" y="1849257"/>
               <a:ext cx="129661" cy="79095"/>
             </a:xfrm>
             <a:prstGeom prst="rect">
@@ -5722,7 +5722,7 @@
           </p:nvSpPr>
           <p:spPr>
             <a:xfrm>
-              <a:off x="763200" y="5577734"/>
+              <a:off x="765852" y="5573121"/>
               <a:ext cx="34794" cy="0"/>
             </a:xfrm>
             <a:custGeom>
@@ -5762,7 +5762,7 @@
           </p:nvSpPr>
           <p:spPr>
             <a:xfrm>
-              <a:off x="763200" y="4839951"/>
+              <a:off x="765852" y="4836258"/>
               <a:ext cx="34794" cy="0"/>
             </a:xfrm>
             <a:custGeom>
@@ -5802,7 +5802,7 @@
           </p:nvSpPr>
           <p:spPr>
             <a:xfrm>
-              <a:off x="763200" y="4102168"/>
+              <a:off x="765852" y="4099395"/>
               <a:ext cx="34794" cy="0"/>
             </a:xfrm>
             <a:custGeom>
@@ -5842,7 +5842,7 @@
           </p:nvSpPr>
           <p:spPr>
             <a:xfrm>
-              <a:off x="763200" y="3364384"/>
+              <a:off x="765852" y="3362531"/>
               <a:ext cx="34794" cy="0"/>
             </a:xfrm>
             <a:custGeom>
@@ -5882,7 +5882,7 @@
           </p:nvSpPr>
           <p:spPr>
             <a:xfrm>
-              <a:off x="763200" y="2626601"/>
+              <a:off x="765852" y="2625668"/>
               <a:ext cx="34794" cy="0"/>
             </a:xfrm>
             <a:custGeom>
@@ -5922,7 +5922,7 @@
           </p:nvSpPr>
           <p:spPr>
             <a:xfrm>
-              <a:off x="763200" y="1888818"/>
+              <a:off x="765852" y="1888804"/>
               <a:ext cx="34794" cy="0"/>
             </a:xfrm>
             <a:custGeom>
@@ -5962,7 +5962,7 @@
           </p:nvSpPr>
           <p:spPr>
             <a:xfrm>
-              <a:off x="2529942" y="5692090"/>
+              <a:off x="2532173" y="5687335"/>
               <a:ext cx="0" cy="34794"/>
             </a:xfrm>
             <a:custGeom>
@@ -6002,7 +6002,7 @@
           </p:nvSpPr>
           <p:spPr>
             <a:xfrm>
-              <a:off x="5067407" y="5692090"/>
+              <a:off x="5069021" y="5687335"/>
               <a:ext cx="0" cy="34794"/>
             </a:xfrm>
             <a:custGeom>
@@ -6042,7 +6042,7 @@
           </p:nvSpPr>
           <p:spPr>
             <a:xfrm>
-              <a:off x="7604872" y="5692090"/>
+              <a:off x="7605870" y="5687335"/>
               <a:ext cx="0" cy="34794"/>
             </a:xfrm>
             <a:custGeom>
@@ -6082,7 +6082,7 @@
           </p:nvSpPr>
           <p:spPr>
             <a:xfrm>
-              <a:off x="10142337" y="5692090"/>
+              <a:off x="10142719" y="5687335"/>
               <a:ext cx="0" cy="34794"/>
             </a:xfrm>
             <a:custGeom>
@@ -6122,7 +6122,7 @@
           </p:nvSpPr>
           <p:spPr>
             <a:xfrm>
-              <a:off x="2497526" y="5754720"/>
+              <a:off x="2499757" y="5749965"/>
               <a:ext cx="64830" cy="79095"/>
             </a:xfrm>
             <a:prstGeom prst="rect">
@@ -6168,7 +6168,7 @@
           </p:nvSpPr>
           <p:spPr>
             <a:xfrm>
-              <a:off x="5034991" y="5754720"/>
+              <a:off x="5036606" y="5749965"/>
               <a:ext cx="64830" cy="79095"/>
             </a:xfrm>
             <a:prstGeom prst="rect">
@@ -6214,7 +6214,7 @@
           </p:nvSpPr>
           <p:spPr>
             <a:xfrm>
-              <a:off x="7572456" y="5754720"/>
+              <a:off x="7573455" y="5749965"/>
               <a:ext cx="64830" cy="79095"/>
             </a:xfrm>
             <a:prstGeom prst="rect">
@@ -6260,7 +6260,7 @@
           </p:nvSpPr>
           <p:spPr>
             <a:xfrm>
-              <a:off x="10109921" y="5754720"/>
+              <a:off x="10110303" y="5749965"/>
               <a:ext cx="64830" cy="79095"/>
             </a:xfrm>
             <a:prstGeom prst="rect">
@@ -6306,7 +6306,7 @@
           </p:nvSpPr>
           <p:spPr>
             <a:xfrm>
-              <a:off x="6181960" y="5893391"/>
+              <a:off x="6183286" y="5890739"/>
               <a:ext cx="148498" cy="98938"/>
             </a:xfrm>
             <a:prstGeom prst="rect">
@@ -6352,7 +6352,7 @@
           </p:nvSpPr>
           <p:spPr>
             <a:xfrm rot="-5400000">
-              <a:off x="340342" y="3735452"/>
+              <a:off x="340342" y="3733074"/>
               <a:ext cx="300380" cy="98938"/>
             </a:xfrm>
             <a:prstGeom prst="rect">

--- a/tests/testthat/temp.pptx
+++ b/tests/testthat/temp.pptx
@@ -3440,8 +3440,8 @@
           </p:nvSpPr>
           <p:spPr>
             <a:xfrm>
-              <a:off x="800647" y="1877752"/>
-              <a:ext cx="10913776" cy="3809583"/>
+              <a:off x="793972" y="1877752"/>
+              <a:ext cx="10920451" cy="3812052"/>
             </a:xfrm>
             <a:prstGeom prst="rect">
               <a:avLst/>
@@ -3466,21 +3466,21 @@
           </p:nvSpPr>
           <p:spPr>
             <a:xfrm>
-              <a:off x="800647" y="5204690"/>
-              <a:ext cx="10913776" cy="0"/>
+              <a:off x="793972" y="5206846"/>
+              <a:ext cx="10920451" cy="0"/>
             </a:xfrm>
             <a:custGeom>
               <a:avLst/>
               <a:pathLst>
-                <a:path w="10913776" h="0">
+                <a:path w="10920451" h="0">
                   <a:moveTo>
                     <a:pt x="0" y="0"/>
                   </a:moveTo>
                   <a:lnTo>
-                    <a:pt x="10913776" y="0"/>
+                    <a:pt x="10920451" y="0"/>
                   </a:lnTo>
                   <a:lnTo>
-                    <a:pt x="10913776" y="0"/>
+                    <a:pt x="10920451" y="0"/>
                   </a:lnTo>
                 </a:path>
               </a:pathLst>
@@ -3509,21 +3509,21 @@
           </p:nvSpPr>
           <p:spPr>
             <a:xfrm>
-              <a:off x="800647" y="4467826"/>
-              <a:ext cx="10913776" cy="0"/>
+              <a:off x="793972" y="4469505"/>
+              <a:ext cx="10920451" cy="0"/>
             </a:xfrm>
             <a:custGeom>
               <a:avLst/>
               <a:pathLst>
-                <a:path w="10913776" h="0">
+                <a:path w="10920451" h="0">
                   <a:moveTo>
                     <a:pt x="0" y="0"/>
                   </a:moveTo>
                   <a:lnTo>
-                    <a:pt x="10913776" y="0"/>
+                    <a:pt x="10920451" y="0"/>
                   </a:lnTo>
                   <a:lnTo>
-                    <a:pt x="10913776" y="0"/>
+                    <a:pt x="10920451" y="0"/>
                   </a:lnTo>
                 </a:path>
               </a:pathLst>
@@ -3552,21 +3552,21 @@
           </p:nvSpPr>
           <p:spPr>
             <a:xfrm>
-              <a:off x="800647" y="3730963"/>
-              <a:ext cx="10913776" cy="0"/>
+              <a:off x="793972" y="3732164"/>
+              <a:ext cx="10920451" cy="0"/>
             </a:xfrm>
             <a:custGeom>
               <a:avLst/>
               <a:pathLst>
-                <a:path w="10913776" h="0">
+                <a:path w="10920451" h="0">
                   <a:moveTo>
                     <a:pt x="0" y="0"/>
                   </a:moveTo>
                   <a:lnTo>
-                    <a:pt x="10913776" y="0"/>
+                    <a:pt x="10920451" y="0"/>
                   </a:lnTo>
                   <a:lnTo>
-                    <a:pt x="10913776" y="0"/>
+                    <a:pt x="10920451" y="0"/>
                   </a:lnTo>
                 </a:path>
               </a:pathLst>
@@ -3595,21 +3595,21 @@
           </p:nvSpPr>
           <p:spPr>
             <a:xfrm>
-              <a:off x="800647" y="2994100"/>
-              <a:ext cx="10913776" cy="0"/>
+              <a:off x="793972" y="2994823"/>
+              <a:ext cx="10920451" cy="0"/>
             </a:xfrm>
             <a:custGeom>
               <a:avLst/>
               <a:pathLst>
-                <a:path w="10913776" h="0">
+                <a:path w="10920451" h="0">
                   <a:moveTo>
                     <a:pt x="0" y="0"/>
                   </a:moveTo>
                   <a:lnTo>
-                    <a:pt x="10913776" y="0"/>
+                    <a:pt x="10920451" y="0"/>
                   </a:lnTo>
                   <a:lnTo>
-                    <a:pt x="10913776" y="0"/>
+                    <a:pt x="10920451" y="0"/>
                   </a:lnTo>
                 </a:path>
               </a:pathLst>
@@ -3638,21 +3638,21 @@
           </p:nvSpPr>
           <p:spPr>
             <a:xfrm>
-              <a:off x="800647" y="2257236"/>
-              <a:ext cx="10913776" cy="0"/>
+              <a:off x="793972" y="2257482"/>
+              <a:ext cx="10920451" cy="0"/>
             </a:xfrm>
             <a:custGeom>
               <a:avLst/>
               <a:pathLst>
-                <a:path w="10913776" h="0">
+                <a:path w="10920451" h="0">
                   <a:moveTo>
                     <a:pt x="0" y="0"/>
                   </a:moveTo>
                   <a:lnTo>
-                    <a:pt x="10913776" y="0"/>
+                    <a:pt x="10920451" y="0"/>
                   </a:lnTo>
                   <a:lnTo>
-                    <a:pt x="10913776" y="0"/>
+                    <a:pt x="10920451" y="0"/>
                   </a:lnTo>
                 </a:path>
               </a:pathLst>
@@ -3681,15 +3681,15 @@
           </p:nvSpPr>
           <p:spPr>
             <a:xfrm>
-              <a:off x="1263748" y="1877752"/>
-              <a:ext cx="0" cy="3809583"/>
+              <a:off x="1257357" y="1877752"/>
+              <a:ext cx="0" cy="3812052"/>
             </a:xfrm>
             <a:custGeom>
               <a:avLst/>
               <a:pathLst>
-                <a:path w="0" h="3809583">
+                <a:path w="0" h="3812052">
                   <a:moveTo>
-                    <a:pt x="0" y="3809583"/>
+                    <a:pt x="0" y="3812052"/>
                   </a:moveTo>
                   <a:lnTo>
                     <a:pt x="0" y="0"/>
@@ -3724,15 +3724,15 @@
           </p:nvSpPr>
           <p:spPr>
             <a:xfrm>
-              <a:off x="3800597" y="1877752"/>
-              <a:ext cx="0" cy="3809583"/>
+              <a:off x="3795757" y="1877752"/>
+              <a:ext cx="0" cy="3812052"/>
             </a:xfrm>
             <a:custGeom>
               <a:avLst/>
               <a:pathLst>
-                <a:path w="0" h="3809583">
+                <a:path w="0" h="3812052">
                   <a:moveTo>
-                    <a:pt x="0" y="3809583"/>
+                    <a:pt x="0" y="3812052"/>
                   </a:moveTo>
                   <a:lnTo>
                     <a:pt x="0" y="0"/>
@@ -3767,15 +3767,15 @@
           </p:nvSpPr>
           <p:spPr>
             <a:xfrm>
-              <a:off x="6337446" y="1877752"/>
-              <a:ext cx="0" cy="3809583"/>
+              <a:off x="6334157" y="1877752"/>
+              <a:ext cx="0" cy="3812052"/>
             </a:xfrm>
             <a:custGeom>
               <a:avLst/>
               <a:pathLst>
-                <a:path w="0" h="3809583">
+                <a:path w="0" h="3812052">
                   <a:moveTo>
-                    <a:pt x="0" y="3809583"/>
+                    <a:pt x="0" y="3812052"/>
                   </a:moveTo>
                   <a:lnTo>
                     <a:pt x="0" y="0"/>
@@ -3810,15 +3810,15 @@
           </p:nvSpPr>
           <p:spPr>
             <a:xfrm>
-              <a:off x="8874294" y="1877752"/>
-              <a:ext cx="0" cy="3809583"/>
+              <a:off x="8872557" y="1877752"/>
+              <a:ext cx="0" cy="3812052"/>
             </a:xfrm>
             <a:custGeom>
               <a:avLst/>
               <a:pathLst>
-                <a:path w="0" h="3809583">
+                <a:path w="0" h="3812052">
                   <a:moveTo>
-                    <a:pt x="0" y="3809583"/>
+                    <a:pt x="0" y="3812052"/>
                   </a:moveTo>
                   <a:lnTo>
                     <a:pt x="0" y="0"/>
@@ -3853,15 +3853,15 @@
           </p:nvSpPr>
           <p:spPr>
             <a:xfrm>
-              <a:off x="11411143" y="1877752"/>
-              <a:ext cx="0" cy="3809583"/>
+              <a:off x="11410958" y="1877752"/>
+              <a:ext cx="0" cy="3812052"/>
             </a:xfrm>
             <a:custGeom>
               <a:avLst/>
               <a:pathLst>
-                <a:path w="0" h="3809583">
+                <a:path w="0" h="3812052">
                   <a:moveTo>
-                    <a:pt x="0" y="3809583"/>
+                    <a:pt x="0" y="3812052"/>
                   </a:moveTo>
                   <a:lnTo>
                     <a:pt x="0" y="0"/>
@@ -3896,21 +3896,21 @@
           </p:nvSpPr>
           <p:spPr>
             <a:xfrm>
-              <a:off x="800647" y="5573121"/>
-              <a:ext cx="10913776" cy="0"/>
+              <a:off x="793972" y="5575516"/>
+              <a:ext cx="10920451" cy="0"/>
             </a:xfrm>
             <a:custGeom>
               <a:avLst/>
               <a:pathLst>
-                <a:path w="10913776" h="0">
+                <a:path w="10920451" h="0">
                   <a:moveTo>
                     <a:pt x="0" y="0"/>
                   </a:moveTo>
                   <a:lnTo>
-                    <a:pt x="10913776" y="0"/>
+                    <a:pt x="10920451" y="0"/>
                   </a:lnTo>
                   <a:lnTo>
-                    <a:pt x="10913776" y="0"/>
+                    <a:pt x="10920451" y="0"/>
                   </a:lnTo>
                 </a:path>
               </a:pathLst>
@@ -3939,21 +3939,21 @@
           </p:nvSpPr>
           <p:spPr>
             <a:xfrm>
-              <a:off x="800647" y="4836258"/>
-              <a:ext cx="10913776" cy="0"/>
+              <a:off x="793972" y="4838175"/>
+              <a:ext cx="10920451" cy="0"/>
             </a:xfrm>
             <a:custGeom>
               <a:avLst/>
               <a:pathLst>
-                <a:path w="10913776" h="0">
+                <a:path w="10920451" h="0">
                   <a:moveTo>
                     <a:pt x="0" y="0"/>
                   </a:moveTo>
                   <a:lnTo>
-                    <a:pt x="10913776" y="0"/>
+                    <a:pt x="10920451" y="0"/>
                   </a:lnTo>
                   <a:lnTo>
-                    <a:pt x="10913776" y="0"/>
+                    <a:pt x="10920451" y="0"/>
                   </a:lnTo>
                 </a:path>
               </a:pathLst>
@@ -3982,21 +3982,21 @@
           </p:nvSpPr>
           <p:spPr>
             <a:xfrm>
-              <a:off x="800647" y="4099395"/>
-              <a:ext cx="10913776" cy="0"/>
+              <a:off x="793972" y="4100834"/>
+              <a:ext cx="10920451" cy="0"/>
             </a:xfrm>
             <a:custGeom>
               <a:avLst/>
               <a:pathLst>
-                <a:path w="10913776" h="0">
+                <a:path w="10920451" h="0">
                   <a:moveTo>
                     <a:pt x="0" y="0"/>
                   </a:moveTo>
                   <a:lnTo>
-                    <a:pt x="10913776" y="0"/>
+                    <a:pt x="10920451" y="0"/>
                   </a:lnTo>
                   <a:lnTo>
-                    <a:pt x="10913776" y="0"/>
+                    <a:pt x="10920451" y="0"/>
                   </a:lnTo>
                 </a:path>
               </a:pathLst>
@@ -4025,21 +4025,21 @@
           </p:nvSpPr>
           <p:spPr>
             <a:xfrm>
-              <a:off x="800647" y="3362531"/>
-              <a:ext cx="10913776" cy="0"/>
+              <a:off x="793972" y="3363494"/>
+              <a:ext cx="10920451" cy="0"/>
             </a:xfrm>
             <a:custGeom>
               <a:avLst/>
               <a:pathLst>
-                <a:path w="10913776" h="0">
+                <a:path w="10920451" h="0">
                   <a:moveTo>
                     <a:pt x="0" y="0"/>
                   </a:moveTo>
                   <a:lnTo>
-                    <a:pt x="10913776" y="0"/>
+                    <a:pt x="10920451" y="0"/>
                   </a:lnTo>
                   <a:lnTo>
-                    <a:pt x="10913776" y="0"/>
+                    <a:pt x="10920451" y="0"/>
                   </a:lnTo>
                 </a:path>
               </a:pathLst>
@@ -4068,21 +4068,21 @@
           </p:nvSpPr>
           <p:spPr>
             <a:xfrm>
-              <a:off x="800647" y="2625668"/>
-              <a:ext cx="10913776" cy="0"/>
+              <a:off x="793972" y="2626153"/>
+              <a:ext cx="10920451" cy="0"/>
             </a:xfrm>
             <a:custGeom>
               <a:avLst/>
               <a:pathLst>
-                <a:path w="10913776" h="0">
+                <a:path w="10920451" h="0">
                   <a:moveTo>
                     <a:pt x="0" y="0"/>
                   </a:moveTo>
                   <a:lnTo>
-                    <a:pt x="10913776" y="0"/>
+                    <a:pt x="10920451" y="0"/>
                   </a:lnTo>
                   <a:lnTo>
-                    <a:pt x="10913776" y="0"/>
+                    <a:pt x="10920451" y="0"/>
                   </a:lnTo>
                 </a:path>
               </a:pathLst>
@@ -4111,21 +4111,21 @@
           </p:nvSpPr>
           <p:spPr>
             <a:xfrm>
-              <a:off x="800647" y="1888804"/>
-              <a:ext cx="10913776" cy="0"/>
+              <a:off x="793972" y="1888812"/>
+              <a:ext cx="10920451" cy="0"/>
             </a:xfrm>
             <a:custGeom>
               <a:avLst/>
               <a:pathLst>
-                <a:path w="10913776" h="0">
+                <a:path w="10920451" h="0">
                   <a:moveTo>
                     <a:pt x="0" y="0"/>
                   </a:moveTo>
                   <a:lnTo>
-                    <a:pt x="10913776" y="0"/>
+                    <a:pt x="10920451" y="0"/>
                   </a:lnTo>
                   <a:lnTo>
-                    <a:pt x="10913776" y="0"/>
+                    <a:pt x="10920451" y="0"/>
                   </a:lnTo>
                 </a:path>
               </a:pathLst>
@@ -4154,15 +4154,15 @@
           </p:nvSpPr>
           <p:spPr>
             <a:xfrm>
-              <a:off x="2532173" y="1877752"/>
-              <a:ext cx="0" cy="3809583"/>
+              <a:off x="2526557" y="1877752"/>
+              <a:ext cx="0" cy="3812052"/>
             </a:xfrm>
             <a:custGeom>
               <a:avLst/>
               <a:pathLst>
-                <a:path w="0" h="3809583">
+                <a:path w="0" h="3812052">
                   <a:moveTo>
-                    <a:pt x="0" y="3809583"/>
+                    <a:pt x="0" y="3812052"/>
                   </a:moveTo>
                   <a:lnTo>
                     <a:pt x="0" y="0"/>
@@ -4197,15 +4197,15 @@
           </p:nvSpPr>
           <p:spPr>
             <a:xfrm>
-              <a:off x="5069021" y="1877752"/>
-              <a:ext cx="0" cy="3809583"/>
+              <a:off x="5064957" y="1877752"/>
+              <a:ext cx="0" cy="3812052"/>
             </a:xfrm>
             <a:custGeom>
               <a:avLst/>
               <a:pathLst>
-                <a:path w="0" h="3809583">
+                <a:path w="0" h="3812052">
                   <a:moveTo>
-                    <a:pt x="0" y="3809583"/>
+                    <a:pt x="0" y="3812052"/>
                   </a:moveTo>
                   <a:lnTo>
                     <a:pt x="0" y="0"/>
@@ -4240,15 +4240,15 @@
           </p:nvSpPr>
           <p:spPr>
             <a:xfrm>
-              <a:off x="7605870" y="1877752"/>
-              <a:ext cx="0" cy="3809583"/>
+              <a:off x="7603357" y="1877752"/>
+              <a:ext cx="0" cy="3812052"/>
             </a:xfrm>
             <a:custGeom>
               <a:avLst/>
               <a:pathLst>
-                <a:path w="0" h="3809583">
+                <a:path w="0" h="3812052">
                   <a:moveTo>
-                    <a:pt x="0" y="3809583"/>
+                    <a:pt x="0" y="3812052"/>
                   </a:moveTo>
                   <a:lnTo>
                     <a:pt x="0" y="0"/>
@@ -4283,15 +4283,15 @@
           </p:nvSpPr>
           <p:spPr>
             <a:xfrm>
-              <a:off x="10142719" y="1877752"/>
-              <a:ext cx="0" cy="3809583"/>
+              <a:off x="10141758" y="1877752"/>
+              <a:ext cx="0" cy="3812052"/>
             </a:xfrm>
             <a:custGeom>
               <a:avLst/>
               <a:pathLst>
-                <a:path w="0" h="3809583">
+                <a:path w="0" h="3812052">
                   <a:moveTo>
-                    <a:pt x="0" y="3809583"/>
+                    <a:pt x="0" y="3812052"/>
                   </a:moveTo>
                   <a:lnTo>
                     <a:pt x="0" y="0"/>
@@ -4326,7 +4326,7 @@
           </p:nvSpPr>
           <p:spPr>
             <a:xfrm>
-              <a:off x="4071944" y="3918947"/>
+              <a:off x="4067290" y="3920291"/>
               <a:ext cx="66150" cy="66150"/>
             </a:xfrm>
             <a:prstGeom prst="ellipse">
@@ -4361,7 +4361,7 @@
           </p:nvSpPr>
           <p:spPr>
             <a:xfrm>
-              <a:off x="4718840" y="3918947"/>
+              <a:off x="4714582" y="3920291"/>
               <a:ext cx="66150" cy="66150"/>
             </a:xfrm>
             <a:prstGeom prst="ellipse">
@@ -4396,7 +4396,7 @@
           </p:nvSpPr>
           <p:spPr>
             <a:xfrm>
-              <a:off x="3310889" y="3653676"/>
+              <a:off x="3305770" y="3654849"/>
               <a:ext cx="66150" cy="66150"/>
             </a:xfrm>
             <a:prstGeom prst="ellipse">
@@ -4431,7 +4431,7 @@
           </p:nvSpPr>
           <p:spPr>
             <a:xfrm>
-              <a:off x="5581369" y="3859998"/>
+              <a:off x="5577638" y="3861304"/>
               <a:ext cx="66150" cy="66150"/>
             </a:xfrm>
             <a:prstGeom prst="ellipse">
@@ -4466,7 +4466,7 @@
           </p:nvSpPr>
           <p:spPr>
             <a:xfrm>
-              <a:off x="6152160" y="4257904"/>
+              <a:off x="6148778" y="4259468"/>
               <a:ext cx="66150" cy="66150"/>
             </a:xfrm>
             <a:prstGeom prst="ellipse">
@@ -4501,7 +4501,7 @@
           </p:nvSpPr>
           <p:spPr>
             <a:xfrm>
-              <a:off x="6202897" y="4346328"/>
+              <a:off x="6199546" y="4347949"/>
               <a:ext cx="66150" cy="66150"/>
             </a:xfrm>
             <a:prstGeom prst="ellipse">
@@ -4536,7 +4536,7 @@
           </p:nvSpPr>
           <p:spPr>
             <a:xfrm>
-              <a:off x="6481950" y="4906344"/>
+              <a:off x="6478770" y="4908328"/>
               <a:ext cx="66150" cy="66150"/>
             </a:xfrm>
             <a:prstGeom prst="ellipse">
@@ -4571,7 +4571,7 @@
           </p:nvSpPr>
           <p:spPr>
             <a:xfrm>
-              <a:off x="5517948" y="3417880"/>
+              <a:off x="5514178" y="3418899"/>
               <a:ext cx="66150" cy="66150"/>
             </a:xfrm>
             <a:prstGeom prst="ellipse">
@@ -4606,7 +4606,7 @@
           </p:nvSpPr>
           <p:spPr>
             <a:xfrm>
-              <a:off x="5416474" y="3653676"/>
+              <a:off x="5412642" y="3654849"/>
               <a:ext cx="66150" cy="66150"/>
             </a:xfrm>
             <a:prstGeom prst="ellipse">
@@ -4641,7 +4641,7 @@
           </p:nvSpPr>
           <p:spPr>
             <a:xfrm>
-              <a:off x="6152160" y="4184218"/>
+              <a:off x="6148778" y="4185734"/>
               <a:ext cx="66150" cy="66150"/>
             </a:xfrm>
             <a:prstGeom prst="ellipse">
@@ -4676,7 +4676,7 @@
           </p:nvSpPr>
           <p:spPr>
             <a:xfrm>
-              <a:off x="6152160" y="4390540"/>
+              <a:off x="6148778" y="4392189"/>
               <a:ext cx="66150" cy="66150"/>
             </a:xfrm>
             <a:prstGeom prst="ellipse">
@@ -4711,7 +4711,7 @@
           </p:nvSpPr>
           <p:spPr>
             <a:xfrm>
-              <a:off x="7750375" y="4596861"/>
+              <a:off x="7747970" y="4598645"/>
               <a:ext cx="66150" cy="66150"/>
             </a:xfrm>
             <a:prstGeom prst="ellipse">
@@ -4746,7 +4746,7 @@
           </p:nvSpPr>
           <p:spPr>
             <a:xfrm>
-              <a:off x="6887846" y="4464226"/>
+              <a:off x="6884914" y="4465924"/>
               <a:ext cx="66150" cy="66150"/>
             </a:xfrm>
             <a:prstGeom prst="ellipse">
@@ -4781,7 +4781,7 @@
           </p:nvSpPr>
           <p:spPr>
             <a:xfrm>
-              <a:off x="7014688" y="4773709"/>
+              <a:off x="7011834" y="4775607"/>
               <a:ext cx="66150" cy="66150"/>
             </a:xfrm>
             <a:prstGeom prst="ellipse">
@@ -4816,7 +4816,7 @@
           </p:nvSpPr>
           <p:spPr>
             <a:xfrm>
-              <a:off x="10743856" y="5481097"/>
+              <a:off x="10743283" y="5483454"/>
               <a:ext cx="66150" cy="66150"/>
             </a:xfrm>
             <a:prstGeom prst="ellipse">
@@ -4851,7 +4851,7 @@
           </p:nvSpPr>
           <p:spPr>
             <a:xfrm>
-              <a:off x="11185268" y="5481097"/>
+              <a:off x="11184964" y="5483454"/>
               <a:ext cx="66150" cy="66150"/>
             </a:xfrm>
             <a:prstGeom prst="ellipse">
@@ -4886,7 +4886,7 @@
           </p:nvSpPr>
           <p:spPr>
             <a:xfrm>
-              <a:off x="10984857" y="4847395"/>
+              <a:off x="10984431" y="4849341"/>
               <a:ext cx="66150" cy="66150"/>
             </a:xfrm>
             <a:prstGeom prst="ellipse">
@@ -4921,7 +4921,7 @@
           </p:nvSpPr>
           <p:spPr>
             <a:xfrm>
-              <a:off x="3006467" y="2238898"/>
+              <a:off x="3001162" y="2239154"/>
               <a:ext cx="66150" cy="66150"/>
             </a:xfrm>
             <a:prstGeom prst="ellipse">
@@ -4956,7 +4956,7 @@
           </p:nvSpPr>
           <p:spPr>
             <a:xfrm>
-              <a:off x="1522411" y="2533644"/>
+              <a:off x="1516198" y="2534090"/>
               <a:ext cx="66150" cy="66150"/>
             </a:xfrm>
             <a:prstGeom prst="ellipse">
@@ -4991,7 +4991,7 @@
           </p:nvSpPr>
           <p:spPr>
             <a:xfrm>
-              <a:off x="2080518" y="2017839"/>
+              <a:off x="2074646" y="2017952"/>
               <a:ext cx="66150" cy="66150"/>
             </a:xfrm>
             <a:prstGeom prst="ellipse">
@@ -5026,7 +5026,7 @@
           </p:nvSpPr>
           <p:spPr>
             <a:xfrm>
-              <a:off x="3678732" y="3845261"/>
+              <a:off x="3673838" y="3846557"/>
               <a:ext cx="66150" cy="66150"/>
             </a:xfrm>
             <a:prstGeom prst="ellipse">
@@ -5061,7 +5061,7 @@
           </p:nvSpPr>
           <p:spPr>
             <a:xfrm>
-              <a:off x="6355108" y="4729497"/>
+              <a:off x="6351850" y="4731366"/>
               <a:ext cx="66150" cy="66150"/>
             </a:xfrm>
             <a:prstGeom prst="ellipse">
@@ -5096,7 +5096,7 @@
           </p:nvSpPr>
           <p:spPr>
             <a:xfrm>
-              <a:off x="6139476" y="4773709"/>
+              <a:off x="6136086" y="4775607"/>
               <a:ext cx="66150" cy="66150"/>
             </a:xfrm>
             <a:prstGeom prst="ellipse">
@@ -5131,7 +5131,7 @@
           </p:nvSpPr>
           <p:spPr>
             <a:xfrm>
-              <a:off x="7166899" y="5053717"/>
+              <a:off x="7164138" y="5055796"/>
               <a:ext cx="66150" cy="66150"/>
             </a:xfrm>
             <a:prstGeom prst="ellipse">
@@ -5166,7 +5166,7 @@
           </p:nvSpPr>
           <p:spPr>
             <a:xfrm>
-              <a:off x="7179584" y="4184218"/>
+              <a:off x="7176830" y="4185734"/>
               <a:ext cx="66150" cy="66150"/>
             </a:xfrm>
             <a:prstGeom prst="ellipse">
@@ -5201,7 +5201,7 @@
           </p:nvSpPr>
           <p:spPr>
             <a:xfrm>
-              <a:off x="2334203" y="2990499"/>
+              <a:off x="2328486" y="2991242"/>
               <a:ext cx="66150" cy="66150"/>
             </a:xfrm>
             <a:prstGeom prst="ellipse">
@@ -5236,7 +5236,7 @@
           </p:nvSpPr>
           <p:spPr>
             <a:xfrm>
-              <a:off x="2854257" y="3182084"/>
+              <a:off x="2848858" y="3182950"/>
               <a:ext cx="66150" cy="66150"/>
             </a:xfrm>
             <a:prstGeom prst="ellipse">
@@ -5271,7 +5271,7 @@
           </p:nvSpPr>
           <p:spPr>
             <a:xfrm>
-              <a:off x="1263652" y="2533644"/>
+              <a:off x="1257281" y="2534090"/>
               <a:ext cx="66150" cy="66150"/>
             </a:xfrm>
             <a:prstGeom prst="ellipse">
@@ -5306,7 +5306,7 @@
           </p:nvSpPr>
           <p:spPr>
             <a:xfrm>
-              <a:off x="5467211" y="4685285"/>
+              <a:off x="5463410" y="4687126"/>
               <a:ext cx="66150" cy="66150"/>
             </a:xfrm>
             <a:prstGeom prst="ellipse">
@@ -5341,7 +5341,7 @@
           </p:nvSpPr>
           <p:spPr>
             <a:xfrm>
-              <a:off x="4452471" y="4110531"/>
+              <a:off x="4448050" y="4112000"/>
               <a:ext cx="66150" cy="66150"/>
             </a:xfrm>
             <a:prstGeom prst="ellipse">
@@ -5376,7 +5376,7 @@
           </p:nvSpPr>
           <p:spPr>
             <a:xfrm>
-              <a:off x="6481950" y="4803183"/>
+              <a:off x="6478770" y="4805100"/>
               <a:ext cx="66150" cy="66150"/>
             </a:xfrm>
             <a:prstGeom prst="ellipse">
@@ -5411,7 +5411,7 @@
           </p:nvSpPr>
           <p:spPr>
             <a:xfrm>
-              <a:off x="4477840" y="3859998"/>
+              <a:off x="4473434" y="3861304"/>
               <a:ext cx="66150" cy="66150"/>
             </a:xfrm>
             <a:prstGeom prst="ellipse">
@@ -5446,8 +5446,8 @@
           </p:nvSpPr>
           <p:spPr>
             <a:xfrm>
-              <a:off x="608355" y="5533574"/>
-              <a:ext cx="129661" cy="79095"/>
+              <a:off x="606983" y="5535466"/>
+              <a:ext cx="124358" cy="80101"/>
             </a:xfrm>
             <a:prstGeom prst="rect">
               <a:avLst/>
@@ -5476,8 +5476,8 @@
                       <a:alpha val="100000"/>
                     </a:srgbClr>
                   </a:solidFill>
-                  <a:latin typeface="Avenir Next"/>
-                  <a:cs typeface="Avenir Next"/>
+                  <a:latin typeface="Helvetica"/>
+                  <a:cs typeface="Helvetica"/>
                 </a:rPr>
                 <a:t>10</a:t>
               </a:r>
@@ -5492,8 +5492,8 @@
           </p:nvSpPr>
           <p:spPr>
             <a:xfrm>
-              <a:off x="608355" y="4796710"/>
-              <a:ext cx="129661" cy="79095"/>
+              <a:off x="606983" y="4798125"/>
+              <a:ext cx="124358" cy="80101"/>
             </a:xfrm>
             <a:prstGeom prst="rect">
               <a:avLst/>
@@ -5522,8 +5522,8 @@
                       <a:alpha val="100000"/>
                     </a:srgbClr>
                   </a:solidFill>
-                  <a:latin typeface="Avenir Next"/>
-                  <a:cs typeface="Avenir Next"/>
+                  <a:latin typeface="Helvetica"/>
+                  <a:cs typeface="Helvetica"/>
                 </a:rPr>
                 <a:t>15</a:t>
               </a:r>
@@ -5538,8 +5538,8 @@
           </p:nvSpPr>
           <p:spPr>
             <a:xfrm>
-              <a:off x="608355" y="4059847"/>
-              <a:ext cx="129661" cy="79095"/>
+              <a:off x="606983" y="4060784"/>
+              <a:ext cx="124358" cy="80101"/>
             </a:xfrm>
             <a:prstGeom prst="rect">
               <a:avLst/>
@@ -5568,8 +5568,8 @@
                       <a:alpha val="100000"/>
                     </a:srgbClr>
                   </a:solidFill>
-                  <a:latin typeface="Avenir Next"/>
-                  <a:cs typeface="Avenir Next"/>
+                  <a:latin typeface="Helvetica"/>
+                  <a:cs typeface="Helvetica"/>
                 </a:rPr>
                 <a:t>20</a:t>
               </a:r>
@@ -5584,8 +5584,8 @@
           </p:nvSpPr>
           <p:spPr>
             <a:xfrm>
-              <a:off x="608355" y="3322983"/>
-              <a:ext cx="129661" cy="79095"/>
+              <a:off x="606983" y="3323443"/>
+              <a:ext cx="124358" cy="80101"/>
             </a:xfrm>
             <a:prstGeom prst="rect">
               <a:avLst/>
@@ -5614,8 +5614,8 @@
                       <a:alpha val="100000"/>
                     </a:srgbClr>
                   </a:solidFill>
-                  <a:latin typeface="Avenir Next"/>
-                  <a:cs typeface="Avenir Next"/>
+                  <a:latin typeface="Helvetica"/>
+                  <a:cs typeface="Helvetica"/>
                 </a:rPr>
                 <a:t>25</a:t>
               </a:r>
@@ -5630,8 +5630,8 @@
           </p:nvSpPr>
           <p:spPr>
             <a:xfrm>
-              <a:off x="608355" y="2586120"/>
-              <a:ext cx="129661" cy="79095"/>
+              <a:off x="606983" y="2586102"/>
+              <a:ext cx="124358" cy="80101"/>
             </a:xfrm>
             <a:prstGeom prst="rect">
               <a:avLst/>
@@ -5660,8 +5660,8 @@
                       <a:alpha val="100000"/>
                     </a:srgbClr>
                   </a:solidFill>
-                  <a:latin typeface="Avenir Next"/>
-                  <a:cs typeface="Avenir Next"/>
+                  <a:latin typeface="Helvetica"/>
+                  <a:cs typeface="Helvetica"/>
                 </a:rPr>
                 <a:t>30</a:t>
               </a:r>
@@ -5676,8 +5676,8 @@
           </p:nvSpPr>
           <p:spPr>
             <a:xfrm>
-              <a:off x="608355" y="1849257"/>
-              <a:ext cx="129661" cy="79095"/>
+              <a:off x="606983" y="1848761"/>
+              <a:ext cx="124358" cy="80101"/>
             </a:xfrm>
             <a:prstGeom prst="rect">
               <a:avLst/>
@@ -5706,8 +5706,8 @@
                       <a:alpha val="100000"/>
                     </a:srgbClr>
                   </a:solidFill>
-                  <a:latin typeface="Avenir Next"/>
-                  <a:cs typeface="Avenir Next"/>
+                  <a:latin typeface="Helvetica"/>
+                  <a:cs typeface="Helvetica"/>
                 </a:rPr>
                 <a:t>35</a:t>
               </a:r>
@@ -5722,7 +5722,7 @@
           </p:nvSpPr>
           <p:spPr>
             <a:xfrm>
-              <a:off x="765852" y="5573121"/>
+              <a:off x="759177" y="5575516"/>
               <a:ext cx="34794" cy="0"/>
             </a:xfrm>
             <a:custGeom>
@@ -5762,7 +5762,7 @@
           </p:nvSpPr>
           <p:spPr>
             <a:xfrm>
-              <a:off x="765852" y="4836258"/>
+              <a:off x="759177" y="4838175"/>
               <a:ext cx="34794" cy="0"/>
             </a:xfrm>
             <a:custGeom>
@@ -5802,7 +5802,7 @@
           </p:nvSpPr>
           <p:spPr>
             <a:xfrm>
-              <a:off x="765852" y="4099395"/>
+              <a:off x="759177" y="4100834"/>
               <a:ext cx="34794" cy="0"/>
             </a:xfrm>
             <a:custGeom>
@@ -5842,7 +5842,7 @@
           </p:nvSpPr>
           <p:spPr>
             <a:xfrm>
-              <a:off x="765852" y="3362531"/>
+              <a:off x="759177" y="3363494"/>
               <a:ext cx="34794" cy="0"/>
             </a:xfrm>
             <a:custGeom>
@@ -5882,7 +5882,7 @@
           </p:nvSpPr>
           <p:spPr>
             <a:xfrm>
-              <a:off x="765852" y="2625668"/>
+              <a:off x="759177" y="2626153"/>
               <a:ext cx="34794" cy="0"/>
             </a:xfrm>
             <a:custGeom>
@@ -5922,7 +5922,7 @@
           </p:nvSpPr>
           <p:spPr>
             <a:xfrm>
-              <a:off x="765852" y="1888804"/>
+              <a:off x="759177" y="1888812"/>
               <a:ext cx="34794" cy="0"/>
             </a:xfrm>
             <a:custGeom>
@@ -5962,7 +5962,7 @@
           </p:nvSpPr>
           <p:spPr>
             <a:xfrm>
-              <a:off x="2532173" y="5687335"/>
+              <a:off x="2526557" y="5689804"/>
               <a:ext cx="0" cy="34794"/>
             </a:xfrm>
             <a:custGeom>
@@ -6002,7 +6002,7 @@
           </p:nvSpPr>
           <p:spPr>
             <a:xfrm>
-              <a:off x="5069021" y="5687335"/>
+              <a:off x="5064957" y="5689804"/>
               <a:ext cx="0" cy="34794"/>
             </a:xfrm>
             <a:custGeom>
@@ -6042,7 +6042,7 @@
           </p:nvSpPr>
           <p:spPr>
             <a:xfrm>
-              <a:off x="7605870" y="5687335"/>
+              <a:off x="7603357" y="5689804"/>
               <a:ext cx="0" cy="34794"/>
             </a:xfrm>
             <a:custGeom>
@@ -6082,7 +6082,7 @@
           </p:nvSpPr>
           <p:spPr>
             <a:xfrm>
-              <a:off x="10142719" y="5687335"/>
+              <a:off x="10141758" y="5689804"/>
               <a:ext cx="0" cy="34794"/>
             </a:xfrm>
             <a:custGeom>
@@ -6122,8 +6122,8 @@
           </p:nvSpPr>
           <p:spPr>
             <a:xfrm>
-              <a:off x="2499757" y="5749965"/>
-              <a:ext cx="64830" cy="79095"/>
+              <a:off x="2495467" y="5752434"/>
+              <a:ext cx="62179" cy="80101"/>
             </a:xfrm>
             <a:prstGeom prst="rect">
               <a:avLst/>
@@ -6152,8 +6152,8 @@
                       <a:alpha val="100000"/>
                     </a:srgbClr>
                   </a:solidFill>
-                  <a:latin typeface="Avenir Next"/>
-                  <a:cs typeface="Avenir Next"/>
+                  <a:latin typeface="Helvetica"/>
+                  <a:cs typeface="Helvetica"/>
                 </a:rPr>
                 <a:t>2</a:t>
               </a:r>
@@ -6168,8 +6168,8 @@
           </p:nvSpPr>
           <p:spPr>
             <a:xfrm>
-              <a:off x="5036606" y="5749965"/>
-              <a:ext cx="64830" cy="79095"/>
+              <a:off x="5033867" y="5752434"/>
+              <a:ext cx="62179" cy="80101"/>
             </a:xfrm>
             <a:prstGeom prst="rect">
               <a:avLst/>
@@ -6198,8 +6198,8 @@
                       <a:alpha val="100000"/>
                     </a:srgbClr>
                   </a:solidFill>
-                  <a:latin typeface="Avenir Next"/>
-                  <a:cs typeface="Avenir Next"/>
+                  <a:latin typeface="Helvetica"/>
+                  <a:cs typeface="Helvetica"/>
                 </a:rPr>
                 <a:t>3</a:t>
               </a:r>
@@ -6214,8 +6214,8 @@
           </p:nvSpPr>
           <p:spPr>
             <a:xfrm>
-              <a:off x="7573455" y="5749965"/>
-              <a:ext cx="64830" cy="79095"/>
+              <a:off x="7572268" y="5752434"/>
+              <a:ext cx="62179" cy="80101"/>
             </a:xfrm>
             <a:prstGeom prst="rect">
               <a:avLst/>
@@ -6244,8 +6244,8 @@
                       <a:alpha val="100000"/>
                     </a:srgbClr>
                   </a:solidFill>
-                  <a:latin typeface="Avenir Next"/>
-                  <a:cs typeface="Avenir Next"/>
+                  <a:latin typeface="Helvetica"/>
+                  <a:cs typeface="Helvetica"/>
                 </a:rPr>
                 <a:t>4</a:t>
               </a:r>
@@ -6260,8 +6260,8 @@
           </p:nvSpPr>
           <p:spPr>
             <a:xfrm>
-              <a:off x="10110303" y="5749965"/>
-              <a:ext cx="64830" cy="79095"/>
+              <a:off x="10110668" y="5752434"/>
+              <a:ext cx="62179" cy="80101"/>
             </a:xfrm>
             <a:prstGeom prst="rect">
               <a:avLst/>
@@ -6290,8 +6290,8 @@
                       <a:alpha val="100000"/>
                     </a:srgbClr>
                   </a:solidFill>
-                  <a:latin typeface="Avenir Next"/>
-                  <a:cs typeface="Avenir Next"/>
+                  <a:latin typeface="Helvetica"/>
+                  <a:cs typeface="Helvetica"/>
                 </a:rPr>
                 <a:t>5</a:t>
               </a:r>
@@ -6306,8 +6306,8 @@
           </p:nvSpPr>
           <p:spPr>
             <a:xfrm>
-              <a:off x="6183286" y="5890739"/>
-              <a:ext cx="148498" cy="98938"/>
+              <a:off x="6184383" y="5892110"/>
+              <a:ext cx="139628" cy="100218"/>
             </a:xfrm>
             <a:prstGeom prst="rect">
               <a:avLst/>
@@ -6336,8 +6336,8 @@
                       <a:alpha val="100000"/>
                     </a:srgbClr>
                   </a:solidFill>
-                  <a:latin typeface="Avenir Next"/>
-                  <a:cs typeface="Avenir Next"/>
+                  <a:latin typeface="Helvetica"/>
+                  <a:cs typeface="Helvetica"/>
                 </a:rPr>
                 <a:t>wt</a:t>
               </a:r>
@@ -6352,8 +6352,8 @@
           </p:nvSpPr>
           <p:spPr>
             <a:xfrm rot="-5400000">
-              <a:off x="340342" y="3733074"/>
-              <a:ext cx="300380" cy="98938"/>
+              <a:off x="355247" y="3733669"/>
+              <a:ext cx="271851" cy="100218"/>
             </a:xfrm>
             <a:prstGeom prst="rect">
               <a:avLst/>
@@ -6382,8 +6382,8 @@
                       <a:alpha val="100000"/>
                     </a:srgbClr>
                   </a:solidFill>
-                  <a:latin typeface="Avenir Next"/>
-                  <a:cs typeface="Avenir Next"/>
+                  <a:latin typeface="Helvetica"/>
+                  <a:cs typeface="Helvetica"/>
                 </a:rPr>
                 <a:t>mpg</a:t>
               </a:r>

--- a/tests/testthat/temp.pptx
+++ b/tests/testthat/temp.pptx
@@ -3440,8 +3440,8 @@
           </p:nvSpPr>
           <p:spPr>
             <a:xfrm>
-              <a:off x="793972" y="1877752"/>
-              <a:ext cx="10920451" cy="3812052"/>
+              <a:off x="792326" y="1877752"/>
+              <a:ext cx="10922097" cy="3815070"/>
             </a:xfrm>
             <a:prstGeom prst="rect">
               <a:avLst/>
@@ -3466,21 +3466,21 @@
           </p:nvSpPr>
           <p:spPr>
             <a:xfrm>
-              <a:off x="793972" y="5206846"/>
-              <a:ext cx="10920451" cy="0"/>
+              <a:off x="792326" y="5209481"/>
+              <a:ext cx="10922097" cy="0"/>
             </a:xfrm>
             <a:custGeom>
               <a:avLst/>
               <a:pathLst>
-                <a:path w="10920451" h="0">
+                <a:path w="10922097" h="0">
                   <a:moveTo>
                     <a:pt x="0" y="0"/>
                   </a:moveTo>
                   <a:lnTo>
-                    <a:pt x="10920451" y="0"/>
+                    <a:pt x="10922097" y="0"/>
                   </a:lnTo>
                   <a:lnTo>
-                    <a:pt x="10920451" y="0"/>
+                    <a:pt x="10922097" y="0"/>
                   </a:lnTo>
                 </a:path>
               </a:pathLst>
@@ -3509,21 +3509,21 @@
           </p:nvSpPr>
           <p:spPr>
             <a:xfrm>
-              <a:off x="793972" y="4469505"/>
-              <a:ext cx="10920451" cy="0"/>
+              <a:off x="792326" y="4471556"/>
+              <a:ext cx="10922097" cy="0"/>
             </a:xfrm>
             <a:custGeom>
               <a:avLst/>
               <a:pathLst>
-                <a:path w="10920451" h="0">
+                <a:path w="10922097" h="0">
                   <a:moveTo>
                     <a:pt x="0" y="0"/>
                   </a:moveTo>
                   <a:lnTo>
-                    <a:pt x="10920451" y="0"/>
+                    <a:pt x="10922097" y="0"/>
                   </a:lnTo>
                   <a:lnTo>
-                    <a:pt x="10920451" y="0"/>
+                    <a:pt x="10922097" y="0"/>
                   </a:lnTo>
                 </a:path>
               </a:pathLst>
@@ -3552,21 +3552,21 @@
           </p:nvSpPr>
           <p:spPr>
             <a:xfrm>
-              <a:off x="793972" y="3732164"/>
-              <a:ext cx="10920451" cy="0"/>
+              <a:off x="792326" y="3733632"/>
+              <a:ext cx="10922097" cy="0"/>
             </a:xfrm>
             <a:custGeom>
               <a:avLst/>
               <a:pathLst>
-                <a:path w="10920451" h="0">
+                <a:path w="10922097" h="0">
                   <a:moveTo>
                     <a:pt x="0" y="0"/>
                   </a:moveTo>
                   <a:lnTo>
-                    <a:pt x="10920451" y="0"/>
+                    <a:pt x="10922097" y="0"/>
                   </a:lnTo>
                   <a:lnTo>
-                    <a:pt x="10920451" y="0"/>
+                    <a:pt x="10922097" y="0"/>
                   </a:lnTo>
                 </a:path>
               </a:pathLst>
@@ -3595,21 +3595,21 @@
           </p:nvSpPr>
           <p:spPr>
             <a:xfrm>
-              <a:off x="793972" y="2994823"/>
-              <a:ext cx="10920451" cy="0"/>
+              <a:off x="792326" y="2995707"/>
+              <a:ext cx="10922097" cy="0"/>
             </a:xfrm>
             <a:custGeom>
               <a:avLst/>
               <a:pathLst>
-                <a:path w="10920451" h="0">
+                <a:path w="10922097" h="0">
                   <a:moveTo>
                     <a:pt x="0" y="0"/>
                   </a:moveTo>
                   <a:lnTo>
-                    <a:pt x="10920451" y="0"/>
+                    <a:pt x="10922097" y="0"/>
                   </a:lnTo>
                   <a:lnTo>
-                    <a:pt x="10920451" y="0"/>
+                    <a:pt x="10922097" y="0"/>
                   </a:lnTo>
                 </a:path>
               </a:pathLst>
@@ -3638,21 +3638,21 @@
           </p:nvSpPr>
           <p:spPr>
             <a:xfrm>
-              <a:off x="793972" y="2257482"/>
-              <a:ext cx="10920451" cy="0"/>
+              <a:off x="792326" y="2257783"/>
+              <a:ext cx="10922097" cy="0"/>
             </a:xfrm>
             <a:custGeom>
               <a:avLst/>
               <a:pathLst>
-                <a:path w="10920451" h="0">
+                <a:path w="10922097" h="0">
                   <a:moveTo>
                     <a:pt x="0" y="0"/>
                   </a:moveTo>
                   <a:lnTo>
-                    <a:pt x="10920451" y="0"/>
+                    <a:pt x="10922097" y="0"/>
                   </a:lnTo>
                   <a:lnTo>
-                    <a:pt x="10920451" y="0"/>
+                    <a:pt x="10922097" y="0"/>
                   </a:lnTo>
                 </a:path>
               </a:pathLst>
@@ -3681,15 +3681,15 @@
           </p:nvSpPr>
           <p:spPr>
             <a:xfrm>
-              <a:off x="1257357" y="1877752"/>
-              <a:ext cx="0" cy="3812052"/>
+              <a:off x="1255780" y="1877752"/>
+              <a:ext cx="0" cy="3815070"/>
             </a:xfrm>
             <a:custGeom>
               <a:avLst/>
               <a:pathLst>
-                <a:path w="0" h="3812052">
+                <a:path w="0" h="3815070">
                   <a:moveTo>
-                    <a:pt x="0" y="3812052"/>
+                    <a:pt x="0" y="3815070"/>
                   </a:moveTo>
                   <a:lnTo>
                     <a:pt x="0" y="0"/>
@@ -3724,15 +3724,15 @@
           </p:nvSpPr>
           <p:spPr>
             <a:xfrm>
-              <a:off x="3795757" y="1877752"/>
-              <a:ext cx="0" cy="3812052"/>
+              <a:off x="3794563" y="1877752"/>
+              <a:ext cx="0" cy="3815070"/>
             </a:xfrm>
             <a:custGeom>
               <a:avLst/>
               <a:pathLst>
-                <a:path w="0" h="3812052">
+                <a:path w="0" h="3815070">
                   <a:moveTo>
-                    <a:pt x="0" y="3812052"/>
+                    <a:pt x="0" y="3815070"/>
                   </a:moveTo>
                   <a:lnTo>
                     <a:pt x="0" y="0"/>
@@ -3767,15 +3767,15 @@
           </p:nvSpPr>
           <p:spPr>
             <a:xfrm>
-              <a:off x="6334157" y="1877752"/>
-              <a:ext cx="0" cy="3812052"/>
+              <a:off x="6333346" y="1877752"/>
+              <a:ext cx="0" cy="3815070"/>
             </a:xfrm>
             <a:custGeom>
               <a:avLst/>
               <a:pathLst>
-                <a:path w="0" h="3812052">
+                <a:path w="0" h="3815070">
                   <a:moveTo>
-                    <a:pt x="0" y="3812052"/>
+                    <a:pt x="0" y="3815070"/>
                   </a:moveTo>
                   <a:lnTo>
                     <a:pt x="0" y="0"/>
@@ -3810,15 +3810,15 @@
           </p:nvSpPr>
           <p:spPr>
             <a:xfrm>
-              <a:off x="8872557" y="1877752"/>
-              <a:ext cx="0" cy="3812052"/>
+              <a:off x="8872129" y="1877752"/>
+              <a:ext cx="0" cy="3815070"/>
             </a:xfrm>
             <a:custGeom>
               <a:avLst/>
               <a:pathLst>
-                <a:path w="0" h="3812052">
+                <a:path w="0" h="3815070">
                   <a:moveTo>
-                    <a:pt x="0" y="3812052"/>
+                    <a:pt x="0" y="3815070"/>
                   </a:moveTo>
                   <a:lnTo>
                     <a:pt x="0" y="0"/>
@@ -3853,15 +3853,15 @@
           </p:nvSpPr>
           <p:spPr>
             <a:xfrm>
-              <a:off x="11410958" y="1877752"/>
-              <a:ext cx="0" cy="3812052"/>
+              <a:off x="11410912" y="1877752"/>
+              <a:ext cx="0" cy="3815070"/>
             </a:xfrm>
             <a:custGeom>
               <a:avLst/>
               <a:pathLst>
-                <a:path w="0" h="3812052">
+                <a:path w="0" h="3815070">
                   <a:moveTo>
-                    <a:pt x="0" y="3812052"/>
+                    <a:pt x="0" y="3815070"/>
                   </a:moveTo>
                   <a:lnTo>
                     <a:pt x="0" y="0"/>
@@ -3896,21 +3896,21 @@
           </p:nvSpPr>
           <p:spPr>
             <a:xfrm>
-              <a:off x="793972" y="5575516"/>
-              <a:ext cx="10920451" cy="0"/>
+              <a:off x="792326" y="5578443"/>
+              <a:ext cx="10922097" cy="0"/>
             </a:xfrm>
             <a:custGeom>
               <a:avLst/>
               <a:pathLst>
-                <a:path w="10920451" h="0">
+                <a:path w="10922097" h="0">
                   <a:moveTo>
                     <a:pt x="0" y="0"/>
                   </a:moveTo>
                   <a:lnTo>
-                    <a:pt x="10920451" y="0"/>
+                    <a:pt x="10922097" y="0"/>
                   </a:lnTo>
                   <a:lnTo>
-                    <a:pt x="10920451" y="0"/>
+                    <a:pt x="10922097" y="0"/>
                   </a:lnTo>
                 </a:path>
               </a:pathLst>
@@ -3939,21 +3939,21 @@
           </p:nvSpPr>
           <p:spPr>
             <a:xfrm>
-              <a:off x="793972" y="4838175"/>
-              <a:ext cx="10920451" cy="0"/>
+              <a:off x="792326" y="4840519"/>
+              <a:ext cx="10922097" cy="0"/>
             </a:xfrm>
             <a:custGeom>
               <a:avLst/>
               <a:pathLst>
-                <a:path w="10920451" h="0">
+                <a:path w="10922097" h="0">
                   <a:moveTo>
                     <a:pt x="0" y="0"/>
                   </a:moveTo>
                   <a:lnTo>
-                    <a:pt x="10920451" y="0"/>
+                    <a:pt x="10922097" y="0"/>
                   </a:lnTo>
                   <a:lnTo>
-                    <a:pt x="10920451" y="0"/>
+                    <a:pt x="10922097" y="0"/>
                   </a:lnTo>
                 </a:path>
               </a:pathLst>
@@ -3982,21 +3982,21 @@
           </p:nvSpPr>
           <p:spPr>
             <a:xfrm>
-              <a:off x="793972" y="4100834"/>
-              <a:ext cx="10920451" cy="0"/>
+              <a:off x="792326" y="4102594"/>
+              <a:ext cx="10922097" cy="0"/>
             </a:xfrm>
             <a:custGeom>
               <a:avLst/>
               <a:pathLst>
-                <a:path w="10920451" h="0">
+                <a:path w="10922097" h="0">
                   <a:moveTo>
                     <a:pt x="0" y="0"/>
                   </a:moveTo>
                   <a:lnTo>
-                    <a:pt x="10920451" y="0"/>
+                    <a:pt x="10922097" y="0"/>
                   </a:lnTo>
                   <a:lnTo>
-                    <a:pt x="10920451" y="0"/>
+                    <a:pt x="10922097" y="0"/>
                   </a:lnTo>
                 </a:path>
               </a:pathLst>
@@ -4025,21 +4025,21 @@
           </p:nvSpPr>
           <p:spPr>
             <a:xfrm>
-              <a:off x="793972" y="3363494"/>
-              <a:ext cx="10920451" cy="0"/>
+              <a:off x="792326" y="3364670"/>
+              <a:ext cx="10922097" cy="0"/>
             </a:xfrm>
             <a:custGeom>
               <a:avLst/>
               <a:pathLst>
-                <a:path w="10920451" h="0">
+                <a:path w="10922097" h="0">
                   <a:moveTo>
                     <a:pt x="0" y="0"/>
                   </a:moveTo>
                   <a:lnTo>
-                    <a:pt x="10920451" y="0"/>
+                    <a:pt x="10922097" y="0"/>
                   </a:lnTo>
                   <a:lnTo>
-                    <a:pt x="10920451" y="0"/>
+                    <a:pt x="10922097" y="0"/>
                   </a:lnTo>
                 </a:path>
               </a:pathLst>
@@ -4068,21 +4068,21 @@
           </p:nvSpPr>
           <p:spPr>
             <a:xfrm>
-              <a:off x="793972" y="2626153"/>
-              <a:ext cx="10920451" cy="0"/>
+              <a:off x="792326" y="2626745"/>
+              <a:ext cx="10922097" cy="0"/>
             </a:xfrm>
             <a:custGeom>
               <a:avLst/>
               <a:pathLst>
-                <a:path w="10920451" h="0">
+                <a:path w="10922097" h="0">
                   <a:moveTo>
                     <a:pt x="0" y="0"/>
                   </a:moveTo>
                   <a:lnTo>
-                    <a:pt x="10920451" y="0"/>
+                    <a:pt x="10922097" y="0"/>
                   </a:lnTo>
                   <a:lnTo>
-                    <a:pt x="10920451" y="0"/>
+                    <a:pt x="10922097" y="0"/>
                   </a:lnTo>
                 </a:path>
               </a:pathLst>
@@ -4111,21 +4111,21 @@
           </p:nvSpPr>
           <p:spPr>
             <a:xfrm>
-              <a:off x="793972" y="1888812"/>
-              <a:ext cx="10920451" cy="0"/>
+              <a:off x="792326" y="1888820"/>
+              <a:ext cx="10922097" cy="0"/>
             </a:xfrm>
             <a:custGeom>
               <a:avLst/>
               <a:pathLst>
-                <a:path w="10920451" h="0">
+                <a:path w="10922097" h="0">
                   <a:moveTo>
                     <a:pt x="0" y="0"/>
                   </a:moveTo>
                   <a:lnTo>
-                    <a:pt x="10920451" y="0"/>
+                    <a:pt x="10922097" y="0"/>
                   </a:lnTo>
                   <a:lnTo>
-                    <a:pt x="10920451" y="0"/>
+                    <a:pt x="10922097" y="0"/>
                   </a:lnTo>
                 </a:path>
               </a:pathLst>
@@ -4154,15 +4154,15 @@
           </p:nvSpPr>
           <p:spPr>
             <a:xfrm>
-              <a:off x="2526557" y="1877752"/>
-              <a:ext cx="0" cy="3812052"/>
+              <a:off x="2525172" y="1877752"/>
+              <a:ext cx="0" cy="3815070"/>
             </a:xfrm>
             <a:custGeom>
               <a:avLst/>
               <a:pathLst>
-                <a:path w="0" h="3812052">
+                <a:path w="0" h="3815070">
                   <a:moveTo>
-                    <a:pt x="0" y="3812052"/>
+                    <a:pt x="0" y="3815070"/>
                   </a:moveTo>
                   <a:lnTo>
                     <a:pt x="0" y="0"/>
@@ -4197,15 +4197,15 @@
           </p:nvSpPr>
           <p:spPr>
             <a:xfrm>
-              <a:off x="5064957" y="1877752"/>
-              <a:ext cx="0" cy="3812052"/>
+              <a:off x="5063955" y="1877752"/>
+              <a:ext cx="0" cy="3815070"/>
             </a:xfrm>
             <a:custGeom>
               <a:avLst/>
               <a:pathLst>
-                <a:path w="0" h="3812052">
+                <a:path w="0" h="3815070">
                   <a:moveTo>
-                    <a:pt x="0" y="3812052"/>
+                    <a:pt x="0" y="3815070"/>
                   </a:moveTo>
                   <a:lnTo>
                     <a:pt x="0" y="0"/>
@@ -4240,15 +4240,15 @@
           </p:nvSpPr>
           <p:spPr>
             <a:xfrm>
-              <a:off x="7603357" y="1877752"/>
-              <a:ext cx="0" cy="3812052"/>
+              <a:off x="7602738" y="1877752"/>
+              <a:ext cx="0" cy="3815070"/>
             </a:xfrm>
             <a:custGeom>
               <a:avLst/>
               <a:pathLst>
-                <a:path w="0" h="3812052">
+                <a:path w="0" h="3815070">
                   <a:moveTo>
-                    <a:pt x="0" y="3812052"/>
+                    <a:pt x="0" y="3815070"/>
                   </a:moveTo>
                   <a:lnTo>
                     <a:pt x="0" y="0"/>
@@ -4283,15 +4283,15 @@
           </p:nvSpPr>
           <p:spPr>
             <a:xfrm>
-              <a:off x="10141758" y="1877752"/>
-              <a:ext cx="0" cy="3812052"/>
+              <a:off x="10141521" y="1877752"/>
+              <a:ext cx="0" cy="3815070"/>
             </a:xfrm>
             <a:custGeom>
               <a:avLst/>
               <a:pathLst>
-                <a:path w="0" h="3812052">
+                <a:path w="0" h="3815070">
                   <a:moveTo>
-                    <a:pt x="0" y="3812052"/>
+                    <a:pt x="0" y="3815070"/>
                   </a:moveTo>
                   <a:lnTo>
                     <a:pt x="0" y="0"/>
@@ -4326,7 +4326,7 @@
           </p:nvSpPr>
           <p:spPr>
             <a:xfrm>
-              <a:off x="4067290" y="3920291"/>
+              <a:off x="4066142" y="3921934"/>
               <a:ext cx="66150" cy="66150"/>
             </a:xfrm>
             <a:prstGeom prst="ellipse">
@@ -4361,7 +4361,7 @@
           </p:nvSpPr>
           <p:spPr>
             <a:xfrm>
-              <a:off x="4714582" y="3920291"/>
+              <a:off x="4713532" y="3921934"/>
               <a:ext cx="66150" cy="66150"/>
             </a:xfrm>
             <a:prstGeom prst="ellipse">
@@ -4396,7 +4396,7 @@
           </p:nvSpPr>
           <p:spPr>
             <a:xfrm>
-              <a:off x="3305770" y="3654849"/>
+              <a:off x="3304507" y="3656281"/>
               <a:ext cx="66150" cy="66150"/>
             </a:xfrm>
             <a:prstGeom prst="ellipse">
@@ -4431,7 +4431,7 @@
           </p:nvSpPr>
           <p:spPr>
             <a:xfrm>
-              <a:off x="5577638" y="3861304"/>
+              <a:off x="5576718" y="3862900"/>
               <a:ext cx="66150" cy="66150"/>
             </a:xfrm>
             <a:prstGeom prst="ellipse">
@@ -4466,7 +4466,7 @@
           </p:nvSpPr>
           <p:spPr>
             <a:xfrm>
-              <a:off x="6148778" y="4259468"/>
+              <a:off x="6147944" y="4261380"/>
               <a:ext cx="66150" cy="66150"/>
             </a:xfrm>
             <a:prstGeom prst="ellipse">
@@ -4501,7 +4501,7 @@
           </p:nvSpPr>
           <p:spPr>
             <a:xfrm>
-              <a:off x="6199546" y="4347949"/>
+              <a:off x="6198720" y="4349931"/>
               <a:ext cx="66150" cy="66150"/>
             </a:xfrm>
             <a:prstGeom prst="ellipse">
@@ -4536,7 +4536,7 @@
           </p:nvSpPr>
           <p:spPr>
             <a:xfrm>
-              <a:off x="6478770" y="4908328"/>
+              <a:off x="6477986" y="4910753"/>
               <a:ext cx="66150" cy="66150"/>
             </a:xfrm>
             <a:prstGeom prst="ellipse">
@@ -4571,7 +4571,7 @@
           </p:nvSpPr>
           <p:spPr>
             <a:xfrm>
-              <a:off x="5514178" y="3418899"/>
+              <a:off x="5513249" y="3420146"/>
               <a:ext cx="66150" cy="66150"/>
             </a:xfrm>
             <a:prstGeom prst="ellipse">
@@ -4606,7 +4606,7 @@
           </p:nvSpPr>
           <p:spPr>
             <a:xfrm>
-              <a:off x="5412642" y="3654849"/>
+              <a:off x="5411697" y="3656281"/>
               <a:ext cx="66150" cy="66150"/>
             </a:xfrm>
             <a:prstGeom prst="ellipse">
@@ -4641,7 +4641,7 @@
           </p:nvSpPr>
           <p:spPr>
             <a:xfrm>
-              <a:off x="6148778" y="4185734"/>
+              <a:off x="6147944" y="4187587"/>
               <a:ext cx="66150" cy="66150"/>
             </a:xfrm>
             <a:prstGeom prst="ellipse">
@@ -4676,7 +4676,7 @@
           </p:nvSpPr>
           <p:spPr>
             <a:xfrm>
-              <a:off x="6148778" y="4392189"/>
+              <a:off x="6147944" y="4394206"/>
               <a:ext cx="66150" cy="66150"/>
             </a:xfrm>
             <a:prstGeom prst="ellipse">
@@ -4711,7 +4711,7 @@
           </p:nvSpPr>
           <p:spPr>
             <a:xfrm>
-              <a:off x="7747970" y="4598645"/>
+              <a:off x="7747377" y="4600825"/>
               <a:ext cx="66150" cy="66150"/>
             </a:xfrm>
             <a:prstGeom prst="ellipse">
@@ -4746,7 +4746,7 @@
           </p:nvSpPr>
           <p:spPr>
             <a:xfrm>
-              <a:off x="6884914" y="4465924"/>
+              <a:off x="6884191" y="4467998"/>
               <a:ext cx="66150" cy="66150"/>
             </a:xfrm>
             <a:prstGeom prst="ellipse">
@@ -4781,7 +4781,7 @@
           </p:nvSpPr>
           <p:spPr>
             <a:xfrm>
-              <a:off x="7011834" y="4775607"/>
+              <a:off x="7011130" y="4777927"/>
               <a:ext cx="66150" cy="66150"/>
             </a:xfrm>
             <a:prstGeom prst="ellipse">
@@ -4816,7 +4816,7 @@
           </p:nvSpPr>
           <p:spPr>
             <a:xfrm>
-              <a:off x="10743283" y="5483454"/>
+              <a:off x="10743141" y="5486334"/>
               <a:ext cx="66150" cy="66150"/>
             </a:xfrm>
             <a:prstGeom prst="ellipse">
@@ -4851,7 +4851,7 @@
           </p:nvSpPr>
           <p:spPr>
             <a:xfrm>
-              <a:off x="11184964" y="5483454"/>
+              <a:off x="11184889" y="5486334"/>
               <a:ext cx="66150" cy="66150"/>
             </a:xfrm>
             <a:prstGeom prst="ellipse">
@@ -4886,7 +4886,7 @@
           </p:nvSpPr>
           <p:spPr>
             <a:xfrm>
-              <a:off x="10984431" y="4849341"/>
+              <a:off x="10984326" y="4851719"/>
               <a:ext cx="66150" cy="66150"/>
             </a:xfrm>
             <a:prstGeom prst="ellipse">
@@ -4921,7 +4921,7 @@
           </p:nvSpPr>
           <p:spPr>
             <a:xfrm>
-              <a:off x="3001162" y="2239154"/>
+              <a:off x="2999853" y="2239466"/>
               <a:ext cx="66150" cy="66150"/>
             </a:xfrm>
             <a:prstGeom prst="ellipse">
@@ -4956,7 +4956,7 @@
           </p:nvSpPr>
           <p:spPr>
             <a:xfrm>
-              <a:off x="1516198" y="2534090"/>
+              <a:off x="1514665" y="2534636"/>
               <a:ext cx="66150" cy="66150"/>
             </a:xfrm>
             <a:prstGeom prst="ellipse">
@@ -4991,7 +4991,7 @@
           </p:nvSpPr>
           <p:spPr>
             <a:xfrm>
-              <a:off x="2074646" y="2017952"/>
+              <a:off x="2073198" y="2018089"/>
               <a:ext cx="66150" cy="66150"/>
             </a:xfrm>
             <a:prstGeom prst="ellipse">
@@ -5026,7 +5026,7 @@
           </p:nvSpPr>
           <p:spPr>
             <a:xfrm>
-              <a:off x="3673838" y="3846557"/>
+              <a:off x="3672631" y="3848142"/>
               <a:ext cx="66150" cy="66150"/>
             </a:xfrm>
             <a:prstGeom prst="ellipse">
@@ -5061,7 +5061,7 @@
           </p:nvSpPr>
           <p:spPr>
             <a:xfrm>
-              <a:off x="6351850" y="4731366"/>
+              <a:off x="6351047" y="4733651"/>
               <a:ext cx="66150" cy="66150"/>
             </a:xfrm>
             <a:prstGeom prst="ellipse">
@@ -5096,7 +5096,7 @@
           </p:nvSpPr>
           <p:spPr>
             <a:xfrm>
-              <a:off x="6136086" y="4775607"/>
+              <a:off x="6135250" y="4777927"/>
               <a:ext cx="66150" cy="66150"/>
             </a:xfrm>
             <a:prstGeom prst="ellipse">
@@ -5131,7 +5131,7 @@
           </p:nvSpPr>
           <p:spPr>
             <a:xfrm>
-              <a:off x="7164138" y="5055796"/>
+              <a:off x="7163457" y="5058338"/>
               <a:ext cx="66150" cy="66150"/>
             </a:xfrm>
             <a:prstGeom prst="ellipse">
@@ -5166,7 +5166,7 @@
           </p:nvSpPr>
           <p:spPr>
             <a:xfrm>
-              <a:off x="7176830" y="4185734"/>
+              <a:off x="7176151" y="4187587"/>
               <a:ext cx="66150" cy="66150"/>
             </a:xfrm>
             <a:prstGeom prst="ellipse">
@@ -5201,7 +5201,7 @@
           </p:nvSpPr>
           <p:spPr>
             <a:xfrm>
-              <a:off x="2328486" y="2991242"/>
+              <a:off x="2327076" y="2992149"/>
               <a:ext cx="66150" cy="66150"/>
             </a:xfrm>
             <a:prstGeom prst="ellipse">
@@ -5236,7 +5236,7 @@
           </p:nvSpPr>
           <p:spPr>
             <a:xfrm>
-              <a:off x="2848858" y="3182950"/>
+              <a:off x="2847526" y="3184010"/>
               <a:ext cx="66150" cy="66150"/>
             </a:xfrm>
             <a:prstGeom prst="ellipse">
@@ -5271,7 +5271,7 @@
           </p:nvSpPr>
           <p:spPr>
             <a:xfrm>
-              <a:off x="1257281" y="2534090"/>
+              <a:off x="1255710" y="2534636"/>
               <a:ext cx="66150" cy="66150"/>
             </a:xfrm>
             <a:prstGeom prst="ellipse">
@@ -5306,7 +5306,7 @@
           </p:nvSpPr>
           <p:spPr>
             <a:xfrm>
-              <a:off x="5463410" y="4687126"/>
+              <a:off x="5462473" y="4689376"/>
               <a:ext cx="66150" cy="66150"/>
             </a:xfrm>
             <a:prstGeom prst="ellipse">
@@ -5341,7 +5341,7 @@
           </p:nvSpPr>
           <p:spPr>
             <a:xfrm>
-              <a:off x="4448050" y="4112000"/>
+              <a:off x="4446960" y="4113795"/>
               <a:ext cx="66150" cy="66150"/>
             </a:xfrm>
             <a:prstGeom prst="ellipse">
@@ -5376,7 +5376,7 @@
           </p:nvSpPr>
           <p:spPr>
             <a:xfrm>
-              <a:off x="6478770" y="4805100"/>
+              <a:off x="6477986" y="4807444"/>
               <a:ext cx="66150" cy="66150"/>
             </a:xfrm>
             <a:prstGeom prst="ellipse">
@@ -5411,7 +5411,7 @@
           </p:nvSpPr>
           <p:spPr>
             <a:xfrm>
-              <a:off x="4473434" y="3861304"/>
+              <a:off x="4472348" y="3862900"/>
               <a:ext cx="66150" cy="66150"/>
             </a:xfrm>
             <a:prstGeom prst="ellipse">
@@ -5446,8 +5446,8 @@
           </p:nvSpPr>
           <p:spPr>
             <a:xfrm>
-              <a:off x="606983" y="5535466"/>
-              <a:ext cx="124358" cy="80101"/>
+              <a:off x="605337" y="5538438"/>
+              <a:ext cx="124358" cy="80010"/>
             </a:xfrm>
             <a:prstGeom prst="rect">
               <a:avLst/>
@@ -5459,9 +5459,6 @@
             <a:lstStyle/>
             <a:p>
               <a:pPr algn="l" marL="0" marR="0" indent="0">
-                <a:lnSpc>
-                  <a:spcPts val="880"/>
-                </a:lnSpc>
                 <a:spcBef>
                   <a:spcPts val="0"/>
                 </a:spcBef>
@@ -5470,14 +5467,14 @@
                 </a:spcAft>
               </a:pPr>
               <a:r>
-                <a:rPr sz="880">
+                <a:rPr sz="880" i="0" b="0">
                   <a:solidFill>
                     <a:srgbClr val="4D4D4D">
                       <a:alpha val="100000"/>
                     </a:srgbClr>
                   </a:solidFill>
-                  <a:latin typeface="Helvetica"/>
-                  <a:cs typeface="Helvetica"/>
+                  <a:latin typeface="Arial"/>
+                  <a:cs typeface="Arial"/>
                 </a:rPr>
                 <a:t>10</a:t>
               </a:r>
@@ -5492,8 +5489,8 @@
           </p:nvSpPr>
           <p:spPr>
             <a:xfrm>
-              <a:off x="606983" y="4798125"/>
-              <a:ext cx="124358" cy="80101"/>
+              <a:off x="605337" y="4800514"/>
+              <a:ext cx="124358" cy="80010"/>
             </a:xfrm>
             <a:prstGeom prst="rect">
               <a:avLst/>
@@ -5505,9 +5502,6 @@
             <a:lstStyle/>
             <a:p>
               <a:pPr algn="l" marL="0" marR="0" indent="0">
-                <a:lnSpc>
-                  <a:spcPts val="880"/>
-                </a:lnSpc>
                 <a:spcBef>
                   <a:spcPts val="0"/>
                 </a:spcBef>
@@ -5516,14 +5510,14 @@
                 </a:spcAft>
               </a:pPr>
               <a:r>
-                <a:rPr sz="880">
+                <a:rPr sz="880" i="0" b="0">
                   <a:solidFill>
                     <a:srgbClr val="4D4D4D">
                       <a:alpha val="100000"/>
                     </a:srgbClr>
                   </a:solidFill>
-                  <a:latin typeface="Helvetica"/>
-                  <a:cs typeface="Helvetica"/>
+                  <a:latin typeface="Arial"/>
+                  <a:cs typeface="Arial"/>
                 </a:rPr>
                 <a:t>15</a:t>
               </a:r>
@@ -5538,8 +5532,8 @@
           </p:nvSpPr>
           <p:spPr>
             <a:xfrm>
-              <a:off x="606983" y="4060784"/>
-              <a:ext cx="124358" cy="80101"/>
+              <a:off x="605337" y="4062589"/>
+              <a:ext cx="124358" cy="80010"/>
             </a:xfrm>
             <a:prstGeom prst="rect">
               <a:avLst/>
@@ -5551,9 +5545,6 @@
             <a:lstStyle/>
             <a:p>
               <a:pPr algn="l" marL="0" marR="0" indent="0">
-                <a:lnSpc>
-                  <a:spcPts val="880"/>
-                </a:lnSpc>
                 <a:spcBef>
                   <a:spcPts val="0"/>
                 </a:spcBef>
@@ -5562,14 +5553,14 @@
                 </a:spcAft>
               </a:pPr>
               <a:r>
-                <a:rPr sz="880">
+                <a:rPr sz="880" i="0" b="0">
                   <a:solidFill>
                     <a:srgbClr val="4D4D4D">
                       <a:alpha val="100000"/>
                     </a:srgbClr>
                   </a:solidFill>
-                  <a:latin typeface="Helvetica"/>
-                  <a:cs typeface="Helvetica"/>
+                  <a:latin typeface="Arial"/>
+                  <a:cs typeface="Arial"/>
                 </a:rPr>
                 <a:t>20</a:t>
               </a:r>
@@ -5584,8 +5575,8 @@
           </p:nvSpPr>
           <p:spPr>
             <a:xfrm>
-              <a:off x="606983" y="3323443"/>
-              <a:ext cx="124358" cy="80101"/>
+              <a:off x="605337" y="3324665"/>
+              <a:ext cx="124358" cy="80010"/>
             </a:xfrm>
             <a:prstGeom prst="rect">
               <a:avLst/>
@@ -5597,9 +5588,6 @@
             <a:lstStyle/>
             <a:p>
               <a:pPr algn="l" marL="0" marR="0" indent="0">
-                <a:lnSpc>
-                  <a:spcPts val="880"/>
-                </a:lnSpc>
                 <a:spcBef>
                   <a:spcPts val="0"/>
                 </a:spcBef>
@@ -5608,14 +5596,14 @@
                 </a:spcAft>
               </a:pPr>
               <a:r>
-                <a:rPr sz="880">
+                <a:rPr sz="880" i="0" b="0">
                   <a:solidFill>
                     <a:srgbClr val="4D4D4D">
                       <a:alpha val="100000"/>
                     </a:srgbClr>
                   </a:solidFill>
-                  <a:latin typeface="Helvetica"/>
-                  <a:cs typeface="Helvetica"/>
+                  <a:latin typeface="Arial"/>
+                  <a:cs typeface="Arial"/>
                 </a:rPr>
                 <a:t>25</a:t>
               </a:r>
@@ -5630,8 +5618,8 @@
           </p:nvSpPr>
           <p:spPr>
             <a:xfrm>
-              <a:off x="606983" y="2586102"/>
-              <a:ext cx="124358" cy="80101"/>
+              <a:off x="605337" y="2586740"/>
+              <a:ext cx="124358" cy="80010"/>
             </a:xfrm>
             <a:prstGeom prst="rect">
               <a:avLst/>
@@ -5643,9 +5631,6 @@
             <a:lstStyle/>
             <a:p>
               <a:pPr algn="l" marL="0" marR="0" indent="0">
-                <a:lnSpc>
-                  <a:spcPts val="880"/>
-                </a:lnSpc>
                 <a:spcBef>
                   <a:spcPts val="0"/>
                 </a:spcBef>
@@ -5654,14 +5639,14 @@
                 </a:spcAft>
               </a:pPr>
               <a:r>
-                <a:rPr sz="880">
+                <a:rPr sz="880" i="0" b="0">
                   <a:solidFill>
                     <a:srgbClr val="4D4D4D">
                       <a:alpha val="100000"/>
                     </a:srgbClr>
                   </a:solidFill>
-                  <a:latin typeface="Helvetica"/>
-                  <a:cs typeface="Helvetica"/>
+                  <a:latin typeface="Arial"/>
+                  <a:cs typeface="Arial"/>
                 </a:rPr>
                 <a:t>30</a:t>
               </a:r>
@@ -5676,8 +5661,8 @@
           </p:nvSpPr>
           <p:spPr>
             <a:xfrm>
-              <a:off x="606983" y="1848761"/>
-              <a:ext cx="124358" cy="80101"/>
+              <a:off x="605337" y="1848815"/>
+              <a:ext cx="124358" cy="80010"/>
             </a:xfrm>
             <a:prstGeom prst="rect">
               <a:avLst/>
@@ -5689,9 +5674,6 @@
             <a:lstStyle/>
             <a:p>
               <a:pPr algn="l" marL="0" marR="0" indent="0">
-                <a:lnSpc>
-                  <a:spcPts val="880"/>
-                </a:lnSpc>
                 <a:spcBef>
                   <a:spcPts val="0"/>
                 </a:spcBef>
@@ -5700,14 +5682,14 @@
                 </a:spcAft>
               </a:pPr>
               <a:r>
-                <a:rPr sz="880">
+                <a:rPr sz="880" i="0" b="0">
                   <a:solidFill>
                     <a:srgbClr val="4D4D4D">
                       <a:alpha val="100000"/>
                     </a:srgbClr>
                   </a:solidFill>
-                  <a:latin typeface="Helvetica"/>
-                  <a:cs typeface="Helvetica"/>
+                  <a:latin typeface="Arial"/>
+                  <a:cs typeface="Arial"/>
                 </a:rPr>
                 <a:t>35</a:t>
               </a:r>
@@ -5722,7 +5704,7 @@
           </p:nvSpPr>
           <p:spPr>
             <a:xfrm>
-              <a:off x="759177" y="5575516"/>
+              <a:off x="757531" y="5578443"/>
               <a:ext cx="34794" cy="0"/>
             </a:xfrm>
             <a:custGeom>
@@ -5762,7 +5744,7 @@
           </p:nvSpPr>
           <p:spPr>
             <a:xfrm>
-              <a:off x="759177" y="4838175"/>
+              <a:off x="757531" y="4840519"/>
               <a:ext cx="34794" cy="0"/>
             </a:xfrm>
             <a:custGeom>
@@ -5802,7 +5784,7 @@
           </p:nvSpPr>
           <p:spPr>
             <a:xfrm>
-              <a:off x="759177" y="4100834"/>
+              <a:off x="757531" y="4102594"/>
               <a:ext cx="34794" cy="0"/>
             </a:xfrm>
             <a:custGeom>
@@ -5842,7 +5824,7 @@
           </p:nvSpPr>
           <p:spPr>
             <a:xfrm>
-              <a:off x="759177" y="3363494"/>
+              <a:off x="757531" y="3364670"/>
               <a:ext cx="34794" cy="0"/>
             </a:xfrm>
             <a:custGeom>
@@ -5882,7 +5864,7 @@
           </p:nvSpPr>
           <p:spPr>
             <a:xfrm>
-              <a:off x="759177" y="2626153"/>
+              <a:off x="757531" y="2626745"/>
               <a:ext cx="34794" cy="0"/>
             </a:xfrm>
             <a:custGeom>
@@ -5922,7 +5904,7 @@
           </p:nvSpPr>
           <p:spPr>
             <a:xfrm>
-              <a:off x="759177" y="1888812"/>
+              <a:off x="757531" y="1888820"/>
               <a:ext cx="34794" cy="0"/>
             </a:xfrm>
             <a:custGeom>
@@ -5962,7 +5944,7 @@
           </p:nvSpPr>
           <p:spPr>
             <a:xfrm>
-              <a:off x="2526557" y="5689804"/>
+              <a:off x="2525172" y="5692822"/>
               <a:ext cx="0" cy="34794"/>
             </a:xfrm>
             <a:custGeom>
@@ -6002,7 +5984,7 @@
           </p:nvSpPr>
           <p:spPr>
             <a:xfrm>
-              <a:off x="5064957" y="5689804"/>
+              <a:off x="5063955" y="5692822"/>
               <a:ext cx="0" cy="34794"/>
             </a:xfrm>
             <a:custGeom>
@@ -6042,7 +6024,7 @@
           </p:nvSpPr>
           <p:spPr>
             <a:xfrm>
-              <a:off x="7603357" y="5689804"/>
+              <a:off x="7602738" y="5692822"/>
               <a:ext cx="0" cy="34794"/>
             </a:xfrm>
             <a:custGeom>
@@ -6082,7 +6064,7 @@
           </p:nvSpPr>
           <p:spPr>
             <a:xfrm>
-              <a:off x="10141758" y="5689804"/>
+              <a:off x="10141521" y="5692822"/>
               <a:ext cx="0" cy="34794"/>
             </a:xfrm>
             <a:custGeom>
@@ -6122,8 +6104,8 @@
           </p:nvSpPr>
           <p:spPr>
             <a:xfrm>
-              <a:off x="2495467" y="5752434"/>
-              <a:ext cx="62179" cy="80101"/>
+              <a:off x="2494082" y="5755452"/>
+              <a:ext cx="62179" cy="80010"/>
             </a:xfrm>
             <a:prstGeom prst="rect">
               <a:avLst/>
@@ -6135,9 +6117,6 @@
             <a:lstStyle/>
             <a:p>
               <a:pPr algn="l" marL="0" marR="0" indent="0">
-                <a:lnSpc>
-                  <a:spcPts val="880"/>
-                </a:lnSpc>
                 <a:spcBef>
                   <a:spcPts val="0"/>
                 </a:spcBef>
@@ -6146,14 +6125,14 @@
                 </a:spcAft>
               </a:pPr>
               <a:r>
-                <a:rPr sz="880">
+                <a:rPr sz="880" i="0" b="0">
                   <a:solidFill>
                     <a:srgbClr val="4D4D4D">
                       <a:alpha val="100000"/>
                     </a:srgbClr>
                   </a:solidFill>
-                  <a:latin typeface="Helvetica"/>
-                  <a:cs typeface="Helvetica"/>
+                  <a:latin typeface="Arial"/>
+                  <a:cs typeface="Arial"/>
                 </a:rPr>
                 <a:t>2</a:t>
               </a:r>
@@ -6168,8 +6147,8 @@
           </p:nvSpPr>
           <p:spPr>
             <a:xfrm>
-              <a:off x="5033867" y="5752434"/>
-              <a:ext cx="62179" cy="80101"/>
+              <a:off x="5032865" y="5755452"/>
+              <a:ext cx="62179" cy="80010"/>
             </a:xfrm>
             <a:prstGeom prst="rect">
               <a:avLst/>
@@ -6181,9 +6160,6 @@
             <a:lstStyle/>
             <a:p>
               <a:pPr algn="l" marL="0" marR="0" indent="0">
-                <a:lnSpc>
-                  <a:spcPts val="880"/>
-                </a:lnSpc>
                 <a:spcBef>
                   <a:spcPts val="0"/>
                 </a:spcBef>
@@ -6192,14 +6168,14 @@
                 </a:spcAft>
               </a:pPr>
               <a:r>
-                <a:rPr sz="880">
+                <a:rPr sz="880" i="0" b="0">
                   <a:solidFill>
                     <a:srgbClr val="4D4D4D">
                       <a:alpha val="100000"/>
                     </a:srgbClr>
                   </a:solidFill>
-                  <a:latin typeface="Helvetica"/>
-                  <a:cs typeface="Helvetica"/>
+                  <a:latin typeface="Arial"/>
+                  <a:cs typeface="Arial"/>
                 </a:rPr>
                 <a:t>3</a:t>
               </a:r>
@@ -6214,8 +6190,8 @@
           </p:nvSpPr>
           <p:spPr>
             <a:xfrm>
-              <a:off x="7572268" y="5752434"/>
-              <a:ext cx="62179" cy="80101"/>
+              <a:off x="7571648" y="5755452"/>
+              <a:ext cx="62179" cy="80010"/>
             </a:xfrm>
             <a:prstGeom prst="rect">
               <a:avLst/>
@@ -6227,9 +6203,6 @@
             <a:lstStyle/>
             <a:p>
               <a:pPr algn="l" marL="0" marR="0" indent="0">
-                <a:lnSpc>
-                  <a:spcPts val="880"/>
-                </a:lnSpc>
                 <a:spcBef>
                   <a:spcPts val="0"/>
                 </a:spcBef>
@@ -6238,14 +6211,14 @@
                 </a:spcAft>
               </a:pPr>
               <a:r>
-                <a:rPr sz="880">
+                <a:rPr sz="880" i="0" b="0">
                   <a:solidFill>
                     <a:srgbClr val="4D4D4D">
                       <a:alpha val="100000"/>
                     </a:srgbClr>
                   </a:solidFill>
-                  <a:latin typeface="Helvetica"/>
-                  <a:cs typeface="Helvetica"/>
+                  <a:latin typeface="Arial"/>
+                  <a:cs typeface="Arial"/>
                 </a:rPr>
                 <a:t>4</a:t>
               </a:r>
@@ -6260,8 +6233,8 @@
           </p:nvSpPr>
           <p:spPr>
             <a:xfrm>
-              <a:off x="10110668" y="5752434"/>
-              <a:ext cx="62179" cy="80101"/>
+              <a:off x="10110431" y="5755452"/>
+              <a:ext cx="62179" cy="80010"/>
             </a:xfrm>
             <a:prstGeom prst="rect">
               <a:avLst/>
@@ -6273,9 +6246,6 @@
             <a:lstStyle/>
             <a:p>
               <a:pPr algn="l" marL="0" marR="0" indent="0">
-                <a:lnSpc>
-                  <a:spcPts val="880"/>
-                </a:lnSpc>
                 <a:spcBef>
                   <a:spcPts val="0"/>
                 </a:spcBef>
@@ -6284,14 +6254,14 @@
                 </a:spcAft>
               </a:pPr>
               <a:r>
-                <a:rPr sz="880">
+                <a:rPr sz="880" i="0" b="0">
                   <a:solidFill>
                     <a:srgbClr val="4D4D4D">
                       <a:alpha val="100000"/>
                     </a:srgbClr>
                   </a:solidFill>
-                  <a:latin typeface="Helvetica"/>
-                  <a:cs typeface="Helvetica"/>
+                  <a:latin typeface="Arial"/>
+                  <a:cs typeface="Arial"/>
                 </a:rPr>
                 <a:t>5</a:t>
               </a:r>
@@ -6306,8 +6276,8 @@
           </p:nvSpPr>
           <p:spPr>
             <a:xfrm>
-              <a:off x="6184383" y="5892110"/>
-              <a:ext cx="139628" cy="100218"/>
+              <a:off x="6183514" y="5893756"/>
+              <a:ext cx="139720" cy="100035"/>
             </a:xfrm>
             <a:prstGeom prst="rect">
               <a:avLst/>
@@ -6319,9 +6289,6 @@
             <a:lstStyle/>
             <a:p>
               <a:pPr algn="l" marL="0" marR="0" indent="0">
-                <a:lnSpc>
-                  <a:spcPts val="1100"/>
-                </a:lnSpc>
                 <a:spcBef>
                   <a:spcPts val="0"/>
                 </a:spcBef>
@@ -6330,14 +6297,14 @@
                 </a:spcAft>
               </a:pPr>
               <a:r>
-                <a:rPr sz="1100">
+                <a:rPr sz="1100" i="0" b="0">
                   <a:solidFill>
                     <a:srgbClr val="000000">
                       <a:alpha val="100000"/>
                     </a:srgbClr>
                   </a:solidFill>
-                  <a:latin typeface="Helvetica"/>
-                  <a:cs typeface="Helvetica"/>
+                  <a:latin typeface="Arial"/>
+                  <a:cs typeface="Arial"/>
                 </a:rPr>
                 <a:t>wt</a:t>
               </a:r>
@@ -6352,8 +6319,8 @@
           </p:nvSpPr>
           <p:spPr>
             <a:xfrm rot="-5400000">
-              <a:off x="355247" y="3733669"/>
-              <a:ext cx="271851" cy="100218"/>
+              <a:off x="355156" y="3735269"/>
+              <a:ext cx="271851" cy="100035"/>
             </a:xfrm>
             <a:prstGeom prst="rect">
               <a:avLst/>
@@ -6365,9 +6332,6 @@
             <a:lstStyle/>
             <a:p>
               <a:pPr algn="l" marL="0" marR="0" indent="0">
-                <a:lnSpc>
-                  <a:spcPts val="1100"/>
-                </a:lnSpc>
                 <a:spcBef>
                   <a:spcPts val="0"/>
                 </a:spcBef>
@@ -6376,14 +6340,14 @@
                 </a:spcAft>
               </a:pPr>
               <a:r>
-                <a:rPr sz="1100">
+                <a:rPr sz="1100" i="0" b="0">
                   <a:solidFill>
                     <a:srgbClr val="000000">
                       <a:alpha val="100000"/>
                     </a:srgbClr>
                   </a:solidFill>
-                  <a:latin typeface="Helvetica"/>
-                  <a:cs typeface="Helvetica"/>
+                  <a:latin typeface="Arial"/>
+                  <a:cs typeface="Arial"/>
                 </a:rPr>
                 <a:t>mpg</a:t>
               </a:r>

--- a/tests/testthat/temp.pptx
+++ b/tests/testthat/temp.pptx
@@ -6404,7 +6404,7 @@
           <a:p>
             <a:r>
               <a:rPr/>
-              <a:t>Notes: notes. 
+              <a:t>Notes: notes.
 Source: source</a:t>
             </a:r>
           </a:p>
